--- a/AndroidMote.pptx
+++ b/AndroidMote.pptx
@@ -306,7 +306,7 @@
             <a:pPr rtl="0"/>
             <a:fld id="{EB190EFE-CCCB-4DCD-B1CF-8C3CB119D6FE}" type="datetime1">
               <a:rPr lang="it-IT" smtClean="0"/>
-              <a:t>20/02/2026</a:t>
+              <a:t>23/02/2026</a:t>
             </a:fld>
             <a:endParaRPr lang="it-IT" dirty="0"/>
           </a:p>
@@ -487,7 +487,7 @@
             <a:fld id="{526AC070-77AE-44FC-B0C8-108B581F9765}" type="datetime1">
               <a:rPr lang="it-IT" noProof="0" smtClean="0"/>
               <a:pPr/>
-              <a:t>20/02/2026</a:t>
+              <a:t>23/02/2026</a:t>
             </a:fld>
             <a:endParaRPr lang="it-IT" noProof="0" dirty="0"/>
           </a:p>
@@ -2801,7 +2801,7 @@
             <a:pPr rtl="0"/>
             <a:fld id="{73953276-A596-464E-8131-16FDC4642D35}" type="datetime1">
               <a:rPr lang="it-IT" noProof="0" smtClean="0"/>
-              <a:t>20/02/2026</a:t>
+              <a:t>23/02/2026</a:t>
             </a:fld>
             <a:endParaRPr lang="it-IT" noProof="0" dirty="0"/>
           </a:p>
@@ -3005,7 +3005,7 @@
             <a:pPr rtl="0"/>
             <a:fld id="{59F66E3F-D06F-47DA-A95C-C846DE23F8C0}" type="datetime1">
               <a:rPr lang="it-IT" noProof="0" smtClean="0"/>
-              <a:t>20/02/2026</a:t>
+              <a:t>23/02/2026</a:t>
             </a:fld>
             <a:endParaRPr lang="it-IT" noProof="0" dirty="0"/>
           </a:p>
@@ -3219,7 +3219,7 @@
             <a:pPr rtl="0"/>
             <a:fld id="{46FE6513-E3C7-4048-AC2F-41B0D1F6D895}" type="datetime1">
               <a:rPr lang="it-IT" noProof="0" smtClean="0"/>
-              <a:t>20/02/2026</a:t>
+              <a:t>23/02/2026</a:t>
             </a:fld>
             <a:endParaRPr lang="it-IT" noProof="0" dirty="0"/>
           </a:p>
@@ -3423,7 +3423,7 @@
             <a:pPr rtl="0"/>
             <a:fld id="{4CA1E7DF-6F8F-47CE-8C70-53A994FBF180}" type="datetime1">
               <a:rPr lang="it-IT" noProof="0" smtClean="0"/>
-              <a:t>20/02/2026</a:t>
+              <a:t>23/02/2026</a:t>
             </a:fld>
             <a:endParaRPr lang="it-IT" noProof="0" dirty="0"/>
           </a:p>
@@ -3703,7 +3703,7 @@
             <a:pPr rtl="0"/>
             <a:fld id="{2CFB8710-ABAB-4285-AF31-02779743E1F4}" type="datetime1">
               <a:rPr lang="it-IT" noProof="0" smtClean="0"/>
-              <a:t>20/02/2026</a:t>
+              <a:t>23/02/2026</a:t>
             </a:fld>
             <a:endParaRPr lang="it-IT" noProof="0" dirty="0"/>
           </a:p>
@@ -3975,7 +3975,7 @@
             <a:pPr rtl="0"/>
             <a:fld id="{FE1FD3F1-0F70-4F3C-841E-3B4B1A9982AD}" type="datetime1">
               <a:rPr lang="it-IT" noProof="0" smtClean="0"/>
-              <a:t>20/02/2026</a:t>
+              <a:t>23/02/2026</a:t>
             </a:fld>
             <a:endParaRPr lang="it-IT" noProof="0" dirty="0"/>
           </a:p>
@@ -4394,7 +4394,7 @@
             <a:pPr rtl="0"/>
             <a:fld id="{3195CD94-E959-4436-A899-6BFB5CD81E9E}" type="datetime1">
               <a:rPr lang="it-IT" noProof="0" smtClean="0"/>
-              <a:t>20/02/2026</a:t>
+              <a:t>23/02/2026</a:t>
             </a:fld>
             <a:endParaRPr lang="it-IT" noProof="0" dirty="0"/>
           </a:p>
@@ -4540,7 +4540,7 @@
             <a:pPr rtl="0"/>
             <a:fld id="{327B0C7F-749B-466A-A38A-03B1C8A2F06C}" type="datetime1">
               <a:rPr lang="it-IT" noProof="0" smtClean="0"/>
-              <a:t>20/02/2026</a:t>
+              <a:t>23/02/2026</a:t>
             </a:fld>
             <a:endParaRPr lang="it-IT" noProof="0" dirty="0"/>
           </a:p>
@@ -4656,7 +4656,7 @@
             <a:pPr rtl="0"/>
             <a:fld id="{DEC309BE-2E90-45F2-A626-98CE1308C9C4}" type="datetime1">
               <a:rPr lang="it-IT" noProof="0" smtClean="0"/>
-              <a:t>20/02/2026</a:t>
+              <a:t>23/02/2026</a:t>
             </a:fld>
             <a:endParaRPr lang="it-IT" noProof="0" dirty="0"/>
           </a:p>
@@ -4973,7 +4973,7 @@
             <a:pPr rtl="0"/>
             <a:fld id="{D7D791A9-9A19-4C7D-9EDF-F6B9F670B73C}" type="datetime1">
               <a:rPr lang="it-IT" noProof="0" smtClean="0"/>
-              <a:t>20/02/2026</a:t>
+              <a:t>23/02/2026</a:t>
             </a:fld>
             <a:endParaRPr lang="it-IT" noProof="0" dirty="0"/>
           </a:p>
@@ -5271,7 +5271,7 @@
             <a:pPr rtl="0"/>
             <a:fld id="{1C87147A-BE07-4D89-850F-642EAF1AAEA9}" type="datetime1">
               <a:rPr lang="it-IT" noProof="0" smtClean="0"/>
-              <a:t>20/02/2026</a:t>
+              <a:t>23/02/2026</a:t>
             </a:fld>
             <a:endParaRPr lang="it-IT" noProof="0" dirty="0"/>
           </a:p>
@@ -5516,7 +5516,7 @@
             <a:pPr rtl="0"/>
             <a:fld id="{750AD8DE-E201-43F1-B9CB-48547493CA6A}" type="datetime1">
               <a:rPr lang="it-IT" noProof="0" smtClean="0"/>
-              <a:t>20/02/2026</a:t>
+              <a:t>23/02/2026</a:t>
             </a:fld>
             <a:endParaRPr lang="it-IT" noProof="0" dirty="0"/>
           </a:p>
@@ -7535,7 +7535,7 @@
         <p:spPr>
           <a:xfrm>
             <a:off x="312168" y="3313725"/>
-            <a:ext cx="11651232" cy="3416320"/>
+            <a:ext cx="11651232" cy="2862322"/>
           </a:xfrm>
           <a:prstGeom prst="rect">
             <a:avLst/>
@@ -7549,42 +7549,17 @@
           <a:lstStyle/>
           <a:p>
             <a:r>
-              <a:rPr lang="it-IT" dirty="0"/>
-              <a:t>Come si può vedere dalla figura sia master che slave sono dotati di un registro a scorrimento connessi circolarmente tramite i segnali MISO e MOSI. In questo modo ad ogni colpo di clock viene scambiato il bit più significativo del proprio registro a scorrimento. Ogni trasferimento è fatto a quanti di byte.</a:t>
+              <a:rPr lang="en-US" dirty="0"/>
+              <a:t>As can be seen from the figure, both master and slave are equipped with a slip register connected circularly through MISO and MOSI signals. In this way, the most significant bit of its sliding register is exchanged at each clock stroke. Each transfer is done at byte quanta.
+During the transfer, the Master will lower the CS line corresponding to the desired Slave and with the clock will run both its own and the Slave's shift register, sending its MSB and receiving that of the Slave. After 8 clock strokes, the register of one will contain the data previously present on the other.</a:t>
             </a:r>
+            <a:endParaRPr lang="it-IT" dirty="0"/>
           </a:p>
           <a:p>
             <a:r>
-              <a:rPr lang="it-IT" dirty="0"/>
-              <a:t>Durante il trasferimento il Master abbasserà la linea CS corrispondente allo Slave desiderato e con il clock farà scorrere sia il proprio registro a scorrimento che quello dello Slave inviando il proprio MSB e ricevendo quello dello Slave. Dopo 8 colpi di clock il registro di uno conterrà il dato presente in precedenza sull’altro.</a:t>
+              <a:rPr lang="en-US" dirty="0"/>
+              <a:t>SPI also allows you to daisy chain devices to use a single line of CS. In this case, the CS line is also used to signal to slaves when to sample their scroll register. The Master injects the data on the MOSI line starting from the most significant bit to be sent to the last slave. When the Master has sent the least significant bit of the first slave, he will then enable the CS line, allowing the sampling of the sliding registers.</a:t>
             </a:r>
-          </a:p>
-          <a:p>
-            <a:endParaRPr lang="it-IT" dirty="0"/>
-          </a:p>
-          <a:p>
-            <a:r>
-              <a:rPr lang="it-IT" dirty="0"/>
-              <a:t>SPI permette anche il </a:t>
-            </a:r>
-            <a:r>
-              <a:rPr lang="it-IT" dirty="0" err="1"/>
-              <a:t>daisy</a:t>
-            </a:r>
-            <a:r>
-              <a:rPr lang="it-IT" dirty="0"/>
-              <a:t> </a:t>
-            </a:r>
-            <a:r>
-              <a:rPr lang="it-IT" dirty="0" err="1"/>
-              <a:t>chaining</a:t>
-            </a:r>
-            <a:r>
-              <a:rPr lang="it-IT" dirty="0"/>
-              <a:t> dei dispositivi per usare una sola linea di CS. In questo caso la linea CS viene utilizzata anche per segnalare agli slave quando campionare il proprio registro a scorrimento. Il Master inietta i dati sulla linea MOSI partendo dal bit più significativo da inviare all’ultimo slave. Quando il Master avrà inviato il bit meno significativo del primo slave abiliterà allora la linea CS permettendo il campionamento dei registri a scorrimento.</a:t>
-            </a:r>
-          </a:p>
-          <a:p>
             <a:endParaRPr lang="it-IT" dirty="0"/>
           </a:p>
         </p:txBody>
@@ -7975,17 +7950,10 @@
           <a:lstStyle/>
           <a:p>
             <a:r>
-              <a:rPr lang="it-IT" dirty="0"/>
-              <a:t>Il Master può essere configurato in base ai parametri CPOL e CPHA. Il primo indica se la base del clock è 1 o 0. Il secondo invece indica il fronte del clock utilizzato per lo </a:t>
+              <a:rPr lang="en-US" dirty="0"/>
+              <a:t>The Master can be configured according to CPOL and CPHA parameters. The first indicates whether the base of the clock is 1 or 0. The second instead indicates the clock edge used for the strobe of the data. If CPOL = 0, the data is sampled on the rising edge if CPHA is 0, on the falling edge if CPHA is 1. Conversely, if CPOL = 1, the data is sampled on the falling edge if CPHA is worth 0, on the rising edge if CPHA is worth 1.</a:t>
             </a:r>
-            <a:r>
-              <a:rPr lang="it-IT" dirty="0" err="1"/>
-              <a:t>strobe</a:t>
-            </a:r>
-            <a:r>
-              <a:rPr lang="it-IT" dirty="0"/>
-              <a:t> del dato. Se CPOL = 0 il dato viene campionato sul fronte di salita se CPHA vale 0, sul fronte di discesa se CPHA vale 1. Viceversa se CPOL = 1 il dato viene campionato sul fronte di discesa se CPHA vale 0, sul fronte di salita se CPHA vale 1.</a:t>
-            </a:r>
+            <a:endParaRPr lang="it-IT" dirty="0"/>
           </a:p>
         </p:txBody>
       </p:sp>
@@ -8307,17 +8275,10 @@
           <a:lstStyle/>
           <a:p>
             <a:r>
-              <a:rPr lang="it-IT" sz="1600" dirty="0"/>
-              <a:t>Oltre ai collegamenti per il funzionamento del protocollo SPI i display con microcontrollore ST7735 posseggono anche un collegamento per il reset e uno per Data/</a:t>
+              <a:rPr lang="en-US" sz="1600" dirty="0"/>
+              <a:t>In addition to the connections for the operation of the SPI protocol, the ST7735 microcontroller displays also have a reset connection and a Data/Command (D/CX) connection. When 8 bits are received via the SPI protocol, they can represent both a command for the controller and data to be written to RAM. The D/CX link is used to interpret the data received via SPI as a command if the line is low, as data if the line is high. The D/CX signal is sampled on the rising edge of the eighth clock stroke of SCLK. Commands are always identified by 8 bits and can be accompanied by parameters that are transmitted in subsequent bytes. Among the various commands, it is worth mentioning those of RASET and CASET that are used to set the memory address window that you want to change before the color information is transmitted and the RAMWR command that enables the writing of the internal RAM within the window set with RASET and CASET.</a:t>
             </a:r>
-            <a:r>
-              <a:rPr lang="it-IT" sz="1600" dirty="0" err="1"/>
-              <a:t>Command</a:t>
-            </a:r>
-            <a:r>
-              <a:rPr lang="it-IT" sz="1600" dirty="0"/>
-              <a:t> (D/CX). Quando vengono ricevuti 8 bit medianti il protocollo SPI questi possono rappresentare sia un comando per il controllore che dei dati da scrivere nella RAM. Il collegamento D/CX viene utilizzato per interpretare i dati ricevuti tramite SPI come comando se la linea è bassa, come dato se questa è alta. Il segnale D/CX viene campionato sul fronte di salita dell’ottavo colpo di clock di SCLK. I comandi sono sempre identificati da 8 bit e possono essere accompagnati da dei parametri che vengono trasmessi nei byte successivi. Tra i vari comandi vale la pena menzionare quelli di RASET e CASET che servono per impostare la finestra di indirizzi di memoria che si vuole modificare prima che venga trasmessa l’informazione cromatica e il comando RAMWR che abilita la scrittura della RAM interna all’interno della finestra impostata con RASET e CASET.</a:t>
-            </a:r>
+            <a:endParaRPr lang="it-IT" sz="1600" dirty="0"/>
           </a:p>
         </p:txBody>
       </p:sp>
@@ -8510,7 +8471,7 @@
             </a:lvl1pPr>
           </a:lstStyle>
           <a:p>
-            <a:pPr algn="ctr" rtl="0"/>
+            <a:pPr algn="ctr"/>
             <a:r>
               <a:rPr lang="it-IT" sz="2800" b="1" dirty="0">
                 <a:solidFill>
@@ -8520,7 +8481,29 @@
                   </a:schemeClr>
                 </a:solidFill>
               </a:rPr>
-              <a:t>ST7735: Architettura interna</a:t>
+              <a:t>ST7735: </a:t>
+            </a:r>
+            <a:r>
+              <a:rPr lang="it-IT" sz="2800" b="1" dirty="0" err="1">
+                <a:solidFill>
+                  <a:schemeClr val="tx1">
+                    <a:lumMod val="75000"/>
+                    <a:lumOff val="25000"/>
+                  </a:schemeClr>
+                </a:solidFill>
+              </a:rPr>
+              <a:t>Internal</a:t>
+            </a:r>
+            <a:r>
+              <a:rPr lang="it-IT" sz="2800" b="1" dirty="0">
+                <a:solidFill>
+                  <a:schemeClr val="tx1">
+                    <a:lumMod val="75000"/>
+                    <a:lumOff val="25000"/>
+                  </a:schemeClr>
+                </a:solidFill>
+              </a:rPr>
+              <a:t> Architecture</a:t>
             </a:r>
             <a:endParaRPr lang="it-IT" sz="2800" dirty="0">
               <a:solidFill>
@@ -8597,7 +8580,7 @@
         <p:spPr>
           <a:xfrm>
             <a:off x="228600" y="4726347"/>
-            <a:ext cx="11734800" cy="2031325"/>
+            <a:ext cx="11734800" cy="1754326"/>
           </a:xfrm>
           <a:prstGeom prst="rect">
             <a:avLst/>
@@ -8611,15 +8594,11 @@
           <a:lstStyle/>
           <a:p>
             <a:r>
-              <a:rPr lang="it-IT" dirty="0"/>
-              <a:t>Il controllore ST7735 è dotato di una RAM statica di 132x162x18-bit. </a:t>
+              <a:rPr lang="en-US" dirty="0"/>
+              <a:t>The ST7735 controller is equipped with a static RAM of 132x162x18-bit. 
+When you want to transmit a new image, you first set up an address window that is identified by the parameters XS and XE for column addresses, and YS and YE for row addresses, this is done with the CASET and RASET commands seen above. When the new color information is transmitted, a row counter and a column counter will be used to set the colors received by SPI pixel by pixel.  There are also a line counter and a scan counter that are used to read the image from the RAM and refresh the image on the display.</a:t>
             </a:r>
-          </a:p>
-          <a:p>
-            <a:r>
-              <a:rPr lang="it-IT" dirty="0"/>
-              <a:t>Quando si vuole trasmettere una nuova immagine viene prima impostata una finestra di indirizzi che viene identificata dai parametri XS e XE per quanto riguarda gli indirizzi colonna, e YS e YE per quanto riguarda gli indirizzi riga, ciò viene fatto con i comandi CASET e RASET visti precedentemente. Quando poi viene trasmessa la nuova informazione cromatica, un contatore di riga e uno di colonna che serviranno ad impostare i colori ricevuti tramite SPI pixel per pixel.  Vi sono poi un contatore di linea e uno di scansione che servono per leggere i l’immagine dalla RAM ed effettuare il refresh dell’immagine sul display.</a:t>
-            </a:r>
+            <a:endParaRPr lang="it-IT" dirty="0"/>
           </a:p>
         </p:txBody>
       </p:sp>
@@ -9451,7 +9430,7 @@
         <p:spPr>
           <a:xfrm>
             <a:off x="6694097" y="672860"/>
-            <a:ext cx="5497903" cy="5078313"/>
+            <a:ext cx="5497903" cy="4801314"/>
           </a:xfrm>
           <a:prstGeom prst="rect">
             <a:avLst/>
@@ -9465,25 +9444,10 @@
           <a:lstStyle/>
           <a:p>
             <a:r>
-              <a:rPr lang="it-IT" dirty="0"/>
-              <a:t>Con il formato RGB 5-6-5 trasmettiamo in totale 16 bit tramite il protocollo SPI per modificare il colore </a:t>
+              <a:rPr lang="en-US" dirty="0"/>
+              <a:t>With the RGB 5-6-5 format, we transmit a total of 16 bits via the SPI protocol to change the color of a pixel. Therefore, two SPI transmissions are needed to transmit all the information of one color. In the first group of 8 bits, the 5 bits of channel R and the first 3 bits of channel G are transmitted, in the second byte the remaining 3 bits of channel G and the 5 bits of channel B are transmitted. In this case the D/CX line is high throughout the transmission and clearly CS is low. When the color information is transmitted, it is converted by means of a look-up table in RGB 6-6-6 format. Then, thanks to the memory window previously set with the RASET and CASET commands, the colors are written to RAM pixel by pixel, using the row and column counters seen previously. The next time the refresh is restored, the display scan will show the new data in memory on the screen.</a:t>
             </a:r>
-            <a:r>
-              <a:rPr lang="it-IT"/>
-              <a:t>di un pixel</a:t>
-            </a:r>
-            <a:r>
-              <a:rPr lang="it-IT" dirty="0"/>
-              <a:t>. Servono quindi due trasmissioni SPI per trasmettere tutta l’informazione di un colore. Nel primo gruppo di 8 bit vengono trasmessi i 5 bit del canale R e i primi 3 bit del canale G, nel secondo byte vengono trasmessi i restanti 3 bit del canale G e i 5 bit del canale B. In questo caso la linea D/CX è alta durante tutta la trasmissione e chiaramente CS è bassa. Quando le informazioni cromatiche vengono trasmesse queste vengono convertite mediante una look-up </a:t>
-            </a:r>
-            <a:r>
-              <a:rPr lang="it-IT" dirty="0" err="1"/>
-              <a:t>table</a:t>
-            </a:r>
-            <a:r>
-              <a:rPr lang="it-IT" dirty="0"/>
-              <a:t> in formato RGB 6-6-6. Dopodiché grazie alla finestra di memoria impostata precedentemente con i comandi RASET e CASET avviene la scrittura in RAM dei colori pixel per pixel fruttando i contatori di riga e di colonna visti precedentemente. Al prossimo il refresh la scansione del display mostrerà i nuovi dati in memoria a video.</a:t>
-            </a:r>
+            <a:endParaRPr lang="it-IT" dirty="0"/>
           </a:p>
         </p:txBody>
       </p:sp>
@@ -9646,7 +9610,7 @@
             </a:lvl1pPr>
           </a:lstStyle>
           <a:p>
-            <a:pPr algn="ctr" rtl="0"/>
+            <a:pPr algn="ctr"/>
             <a:r>
               <a:rPr lang="it-IT" sz="2800" b="1" dirty="0">
                 <a:solidFill>
@@ -9656,7 +9620,18 @@
                   </a:schemeClr>
                 </a:solidFill>
               </a:rPr>
-              <a:t>ST7735: Sequenza di accensione</a:t>
+              <a:t>ST7735: Power-On </a:t>
+            </a:r>
+            <a:r>
+              <a:rPr lang="it-IT" sz="2800" b="1" dirty="0" err="1">
+                <a:solidFill>
+                  <a:schemeClr val="tx1">
+                    <a:lumMod val="75000"/>
+                    <a:lumOff val="25000"/>
+                  </a:schemeClr>
+                </a:solidFill>
+              </a:rPr>
+              <a:t>Sequence</a:t>
             </a:r>
             <a:endParaRPr lang="it-IT" sz="2800" dirty="0">
               <a:solidFill>
@@ -12248,9 +12223,10 @@
                     <a:p>
                       <a:pPr algn="ctr"/>
                       <a:r>
-                        <a:rPr lang="it-IT" sz="1000" dirty="0"/>
-                        <a:t>Disattiva inversione refresh display.</a:t>
+                        <a:rPr lang="en-US" sz="1000" dirty="0"/>
+                        <a:t>Turn off reverse display refresh.</a:t>
                       </a:r>
+                      <a:endParaRPr lang="it-IT" sz="1000" dirty="0"/>
                     </a:p>
                   </a:txBody>
                   <a:tcPr anchor="ctr">
@@ -14593,7 +14569,15 @@
                       <a:pPr algn="ctr"/>
                       <a:r>
                         <a:rPr lang="it-IT" sz="1000" dirty="0"/>
-                        <a:t>Non invertire display.</a:t>
+                        <a:t>Do </a:t>
+                      </a:r>
+                      <a:r>
+                        <a:rPr lang="it-IT" sz="1000" dirty="0" err="1"/>
+                        <a:t>not</a:t>
+                      </a:r>
+                      <a:r>
+                        <a:rPr lang="it-IT" sz="1000" dirty="0"/>
+                        <a:t> reverse display.</a:t>
                       </a:r>
                     </a:p>
                   </a:txBody>
@@ -14929,9 +14913,10 @@
                     <a:p>
                       <a:pPr algn="ctr"/>
                       <a:r>
-                        <a:rPr lang="it-IT" sz="1000" dirty="0"/>
-                        <a:t>Refresh dal basso verso l’alto. Rotazione normale.</a:t>
+                        <a:rPr lang="en-US" sz="1000" dirty="0"/>
+                        <a:t>Refresh from bottom to top. Normal rotation.</a:t>
                       </a:r>
+                      <a:endParaRPr lang="it-IT" sz="1000" dirty="0"/>
                     </a:p>
                   </a:txBody>
                   <a:tcPr anchor="ctr">
@@ -15267,7 +15252,7 @@
                       <a:pPr algn="ctr"/>
                       <a:r>
                         <a:rPr lang="it-IT" sz="1000" dirty="0"/>
-                        <a:t>Modalità colore RGB 5-6-5 16 bit.</a:t>
+                        <a:t>RGB color mode 5-6-5 16-bit.</a:t>
                       </a:r>
                     </a:p>
                   </a:txBody>
@@ -16310,7 +16295,23 @@
                       <a:pPr algn="ctr"/>
                       <a:r>
                         <a:rPr lang="it-IT" sz="1000" dirty="0"/>
-                        <a:t>Correzione gamma (polarità positiva).</a:t>
+                        <a:t>Gamma </a:t>
+                      </a:r>
+                      <a:r>
+                        <a:rPr lang="it-IT" sz="1000" dirty="0" err="1"/>
+                        <a:t>correction</a:t>
+                      </a:r>
+                      <a:r>
+                        <a:rPr lang="it-IT" sz="1000" dirty="0"/>
+                        <a:t> (positive </a:t>
+                      </a:r>
+                      <a:r>
+                        <a:rPr lang="it-IT" sz="1000" dirty="0" err="1"/>
+                        <a:t>polarity</a:t>
+                      </a:r>
+                      <a:r>
+                        <a:rPr lang="it-IT" sz="1000" dirty="0"/>
+                        <a:t>).</a:t>
                       </a:r>
                     </a:p>
                   </a:txBody>
@@ -16655,7 +16656,23 @@
                       <a:pPr algn="ctr"/>
                       <a:r>
                         <a:rPr lang="it-IT" sz="1000" dirty="0"/>
-                        <a:t>Correzione gamma (polarità negativa).</a:t>
+                        <a:t>Gamma </a:t>
+                      </a:r>
+                      <a:r>
+                        <a:rPr lang="it-IT" sz="1000" dirty="0" err="1"/>
+                        <a:t>correction</a:t>
+                      </a:r>
+                      <a:r>
+                        <a:rPr lang="it-IT" sz="1000" dirty="0"/>
+                        <a:t> (negative </a:t>
+                      </a:r>
+                      <a:r>
+                        <a:rPr lang="it-IT" sz="1000" dirty="0" err="1"/>
+                        <a:t>polarity</a:t>
+                      </a:r>
+                      <a:r>
+                        <a:rPr lang="it-IT" sz="1000" dirty="0"/>
+                        <a:t>).</a:t>
                       </a:r>
                     </a:p>
                   </a:txBody>
@@ -17352,8 +17369,12 @@
                     <a:p>
                       <a:pPr algn="ctr"/>
                       <a:r>
+                        <a:rPr lang="it-IT" sz="1000" dirty="0" err="1"/>
+                        <a:t>Main</a:t>
+                      </a:r>
+                      <a:r>
                         <a:rPr lang="it-IT" sz="1000" dirty="0"/>
-                        <a:t>Schermo principale on.</a:t>
+                        <a:t> screen on.</a:t>
                       </a:r>
                     </a:p>
                   </a:txBody>
@@ -17581,7 +17602,7 @@
                   </a:schemeClr>
                 </a:solidFill>
               </a:rPr>
-              <a:t>ST7735: codice per STM32</a:t>
+              <a:t>ST7735: code for STM32</a:t>
             </a:r>
             <a:endParaRPr lang="it-IT" sz="2800" dirty="0">
               <a:solidFill>
@@ -17723,20 +17744,24 @@
             <a:p>
               <a:pPr algn="ctr"/>
               <a:r>
-                <a:rPr lang="it-IT" sz="1100" b="1" dirty="0"/>
-                <a:t>Funzioni </a:t>
-              </a:r>
-              <a:r>
                 <a:rPr lang="it-IT" sz="1100" b="1" dirty="0" err="1"/>
                 <a:t>WriteCommand</a:t>
               </a:r>
               <a:r>
                 <a:rPr lang="it-IT" sz="1100" b="1" dirty="0"/>
-                <a:t> e </a:t>
+                <a:t> and </a:t>
               </a:r>
               <a:r>
                 <a:rPr lang="it-IT" sz="1100" b="1" dirty="0" err="1"/>
                 <a:t>WriteData</a:t>
+              </a:r>
+              <a:r>
+                <a:rPr lang="it-IT" sz="1100" b="1" dirty="0"/>
+                <a:t> </a:t>
+              </a:r>
+              <a:r>
+                <a:rPr lang="it-IT" sz="1100" b="1" dirty="0" err="1"/>
+                <a:t>Functions</a:t>
               </a:r>
               <a:endParaRPr lang="it-IT" sz="1100" b="1" dirty="0"/>
             </a:p>
@@ -17874,20 +17899,24 @@
             <a:p>
               <a:pPr algn="ctr"/>
               <a:r>
-                <a:rPr lang="it-IT" sz="1100" b="1" dirty="0"/>
-                <a:t>Funzioni </a:t>
-              </a:r>
-              <a:r>
                 <a:rPr lang="it-IT" sz="1100" b="1" dirty="0" err="1"/>
                 <a:t>SetAddressWindow</a:t>
               </a:r>
               <a:r>
                 <a:rPr lang="it-IT" sz="1100" b="1" dirty="0"/>
-                <a:t> e </a:t>
+                <a:t> and </a:t>
               </a:r>
               <a:r>
                 <a:rPr lang="it-IT" sz="1100" b="1" dirty="0" err="1"/>
                 <a:t>FillRectangle</a:t>
+              </a:r>
+              <a:r>
+                <a:rPr lang="it-IT" sz="1100" b="1" dirty="0"/>
+                <a:t> </a:t>
+              </a:r>
+              <a:r>
+                <a:rPr lang="it-IT" sz="1100" b="1" dirty="0" err="1"/>
+                <a:t>Functions</a:t>
               </a:r>
               <a:endParaRPr lang="it-IT" sz="1100" b="1" dirty="0"/>
             </a:p>
@@ -18170,7 +18199,7 @@
         <p:spPr>
           <a:xfrm>
             <a:off x="1064822" y="4190584"/>
-            <a:ext cx="9660328" cy="2308324"/>
+            <a:ext cx="9660328" cy="2031325"/>
           </a:xfrm>
           <a:prstGeom prst="rect">
             <a:avLst/>
@@ -18184,35 +18213,15 @@
           <a:lstStyle/>
           <a:p>
             <a:r>
-              <a:rPr lang="it-IT" dirty="0" err="1"/>
+              <a:rPr lang="en-US" dirty="0" err="1"/>
               <a:t>AndroidMote</a:t>
             </a:r>
             <a:r>
-              <a:rPr lang="it-IT" dirty="0"/>
-              <a:t> è l’applicazione realizzata per utilizzare il telefono come dispositivo di puntamento. L’interfaccia è composta dall’anteprima della fotocamera accompagnata da una barra a scorrimento verticale che include i controlli per l’elaborazione dell’immagine e la connettività Bluetooth. Per la realizzazione dell’elaborazione delle immagini è stata utilizzata la libreria </a:t>
+              <a:rPr lang="en-US" dirty="0"/>
+              <a:t> is the application made to use your phone as a pointing device. The interface consists of the camera preview accompanied by a vertical slider bar that includes controls for image processing and Bluetooth connectivity. The OpenCV library was used for image processing, while a library was also used for Bluetooth connectivity using the SPP profile.
+Among the controls we have the possibility to change the preview mode, to modify the brightness threshold for the detection of bright spots, the adjustment of the Gaussian blur and the activation / deactivation of the bounding boxes.</a:t>
             </a:r>
-            <a:r>
-              <a:rPr lang="it-IT" dirty="0" err="1"/>
-              <a:t>OpenCV</a:t>
-            </a:r>
-            <a:r>
-              <a:rPr lang="it-IT" dirty="0"/>
-              <a:t>, mentre è stata sfruttata una libreria anche per la connettività Bluetooth sfruttando il profilo SPP.</a:t>
-            </a:r>
-          </a:p>
-          <a:p>
-            <a:r>
-              <a:rPr lang="it-IT" dirty="0"/>
-              <a:t>Tra i controlli abbiamo la possibilità di cambiare la modalità dell’anteprima, di modificare la soglia di luminosità per la rilevazione dei punti luminosi, la regolazione della sfocatura gaussiana e l’attivazione/disattivazione delle </a:t>
-            </a:r>
-            <a:r>
-              <a:rPr lang="it-IT" dirty="0" err="1"/>
-              <a:t>bounding</a:t>
-            </a:r>
-            <a:r>
-              <a:rPr lang="it-IT" dirty="0"/>
-              <a:t> box.</a:t>
-            </a:r>
+            <a:endParaRPr lang="it-IT" dirty="0"/>
           </a:p>
         </p:txBody>
       </p:sp>
@@ -18462,7 +18471,7 @@
         <p:spPr>
           <a:xfrm>
             <a:off x="163902" y="862642"/>
-            <a:ext cx="11734800" cy="4247317"/>
+            <a:ext cx="11734800" cy="3693319"/>
           </a:xfrm>
           <a:prstGeom prst="rect">
             <a:avLst/>
@@ -18476,47 +18485,31 @@
           <a:lstStyle/>
           <a:p>
             <a:r>
-              <a:rPr lang="it-IT" dirty="0"/>
-              <a:t>I dispositivi wireless sono una categoria di oggetti di elettronica di consumo estremamente ricercata oggi. Alcuni esempi di tali dispositivi sono cuffie e speaker wireless, mouse, tastiere, smartwatch e svariati dispositivi IoT.</a:t>
+              <a:rPr lang="en-US" dirty="0"/>
+              <a:t>Wireless devices are a highly sought-after category of consumer electronics items today. Examples of such devices include wireless headphones and speakers, mice, keyboards, smartwatches, and various IoT devices.</a:t>
             </a:r>
           </a:p>
           <a:p>
+            <a:r>
+              <a:rPr lang="en-US" dirty="0"/>
+              <a:t>
+In addition to consumer electronics, the use of wireless technology is also of fundamental importance in areas in industrial environments where machinery must be controlled remotely and the use of cables can be problematic.</a:t>
+            </a:r>
+          </a:p>
+          <a:p>
+            <a:r>
+              <a:rPr lang="en-US" dirty="0"/>
+              <a:t>
+The design of these devices has become of fundamental importance and takes on an increasingly important role thanks to the improvement of the processing capabilities of the devices combined with the reduction of consumption and the improvement of other technologies such as batteries.</a:t>
+            </a:r>
+          </a:p>
+          <a:p>
+            <a:r>
+              <a:rPr lang="en-US" dirty="0"/>
+              <a:t>
+In this project, an early-prototype of a Bluetooth pointing device (IEEE 802.15.1) is developed by combining various technologies and tools. Some technical/economic considerations will also be made that led to the choice and use of certain components.</a:t>
+            </a:r>
             <a:endParaRPr lang="it-IT" dirty="0"/>
-          </a:p>
-          <a:p>
-            <a:r>
-              <a:rPr lang="it-IT" dirty="0"/>
-              <a:t>Oltre che nell’elettronica di consumo l’utilizzo della tecnologia wireless è di fondamentale importanza anche in ambiti negli ambiti industriali nei quali bisogna controllare a distanza dei macchinari e l’utilizzo di cavi può risultare problematico.</a:t>
-            </a:r>
-          </a:p>
-          <a:p>
-            <a:endParaRPr lang="it-IT" dirty="0"/>
-          </a:p>
-          <a:p>
-            <a:r>
-              <a:rPr lang="it-IT" dirty="0"/>
-              <a:t>La progettazione di questi dispositivi è diventata di importanza fondamentale e assume un ruolo sempre più importante grazie al miglioramento delle capacità elaborative dei dispositivi unita alla riduzione dei consumi e al miglioramento di altre tecnologie come quelle delle batterie.</a:t>
-            </a:r>
-          </a:p>
-          <a:p>
-            <a:endParaRPr lang="it-IT" dirty="0"/>
-          </a:p>
-          <a:p>
-            <a:endParaRPr lang="it-IT" dirty="0"/>
-          </a:p>
-          <a:p>
-            <a:r>
-              <a:rPr lang="it-IT" dirty="0"/>
-              <a:t>In questo progetto viene sviluppato un </a:t>
-            </a:r>
-            <a:r>
-              <a:rPr lang="it-IT" dirty="0" err="1"/>
-              <a:t>early-prototype</a:t>
-            </a:r>
-            <a:r>
-              <a:rPr lang="it-IT" dirty="0"/>
-              <a:t> di un dispositivo di puntamento Bluetooth (IEEE 802.15.1) unendo varie tecnologie e strumenti. Verranno fatte anche alcune considerazioni tecniche/economiche che hanno portato alla scelta e all’utilizzo di certi componenti.</a:t>
-            </a:r>
           </a:p>
         </p:txBody>
       </p:sp>
@@ -19205,7 +19198,7 @@
         <p:spPr>
           <a:xfrm>
             <a:off x="1064822" y="4190584"/>
-            <a:ext cx="9660328" cy="2308324"/>
+            <a:ext cx="9660328" cy="2031325"/>
           </a:xfrm>
           <a:prstGeom prst="rect">
             <a:avLst/>
@@ -19219,47 +19212,11 @@
           <a:lstStyle/>
           <a:p>
             <a:r>
-              <a:rPr lang="it-IT" dirty="0"/>
-              <a:t>L’elaborazione effettuata in </a:t>
+              <a:rPr lang="en-US" dirty="0"/>
+              <a:t>The processing done in OpenCV every time a frame arrives first performs a grayscale conversion. Gaussian blur is then applied to eliminate any noise from small points of light and to reduce the effect of minor variations in a bright area. Subsequently, with a threshold, all the areas of low brightness are discarded. The last processing consists of identifying the connected pixels (Connected Components) and drawing a bounding box around each of the identified areas.
+Starting with OpenCV processing, the center of up to two light zones and their relative size are sent via Bluetooth SPP to the HC-05.</a:t>
             </a:r>
-            <a:r>
-              <a:rPr lang="it-IT" dirty="0" err="1"/>
-              <a:t>OpenCV</a:t>
-            </a:r>
-            <a:r>
-              <a:rPr lang="it-IT" dirty="0"/>
-              <a:t> ogni volta che arriva un fotogramma effettua prima una conversione in scala di grigi. Dopodiché viene applicata una sfocatura Gaussiana per eliminare eventuali disturbi dovuti a piccoli punti luminosi e per ridurre l’effetto delle minime variazioni di una zona luminosa. Successivamente con una soglia vengono scartati tutte le zone di bassa luminosità. L’ultima elaborazione consiste nell’individuare i pixel connessi (</a:t>
-            </a:r>
-            <a:r>
-              <a:rPr lang="it-IT" dirty="0" err="1"/>
-              <a:t>Connected</a:t>
-            </a:r>
-            <a:r>
-              <a:rPr lang="it-IT" dirty="0"/>
-              <a:t> Components) e disegnare una </a:t>
-            </a:r>
-            <a:r>
-              <a:rPr lang="it-IT" dirty="0" err="1"/>
-              <a:t>bounding</a:t>
-            </a:r>
-            <a:r>
-              <a:rPr lang="it-IT" dirty="0"/>
-              <a:t> box attorno a ognuna delle zone individuate.</a:t>
-            </a:r>
-          </a:p>
-          <a:p>
-            <a:r>
-              <a:rPr lang="it-IT" dirty="0"/>
-              <a:t>A partire dall’elaborazione in </a:t>
-            </a:r>
-            <a:r>
-              <a:rPr lang="it-IT" dirty="0" err="1"/>
-              <a:t>OpenCV</a:t>
-            </a:r>
-            <a:r>
-              <a:rPr lang="it-IT" dirty="0"/>
-              <a:t> vengono inviate tramite Bluetooth SPP all’HC-05 il centro di fino a due zone luminose e la loro dimensione relativa.</a:t>
-            </a:r>
+            <a:endParaRPr lang="it-IT" dirty="0"/>
           </a:p>
         </p:txBody>
       </p:sp>
@@ -19422,7 +19379,7 @@
             </a:lvl1pPr>
           </a:lstStyle>
           <a:p>
-            <a:pPr algn="ctr" rtl="0"/>
+            <a:pPr algn="ctr"/>
             <a:r>
               <a:rPr lang="it-IT" sz="2800" b="1" dirty="0">
                 <a:solidFill>
@@ -19432,7 +19389,7 @@
                   </a:schemeClr>
                 </a:solidFill>
               </a:rPr>
-              <a:t>HC-05: ricezione dati Bluetooth</a:t>
+              <a:t>HC-05: Bluetooth Data Reception</a:t>
             </a:r>
             <a:endParaRPr lang="it-IT" sz="2800" dirty="0">
               <a:solidFill>
@@ -19539,7 +19496,7 @@
         <p:spPr>
           <a:xfrm>
             <a:off x="4847468" y="671006"/>
-            <a:ext cx="7115932" cy="5632311"/>
+            <a:ext cx="7115932" cy="5078313"/>
           </a:xfrm>
           <a:prstGeom prst="rect">
             <a:avLst/>
@@ -19553,8 +19510,8 @@
           <a:lstStyle/>
           <a:p>
             <a:r>
-              <a:rPr lang="it-IT" dirty="0"/>
-              <a:t>Nel caso in cui venga individuata una sola zona luminosa questa viene usata come puntatore disegnando un quadrato rosso sull’ST7735. </a:t>
+              <a:rPr lang="en-US" dirty="0"/>
+              <a:t>If only one bright area is found, it is used as a pointer by drawing a red square on the ST7735.</a:t>
             </a:r>
           </a:p>
           <a:p>
@@ -19562,14 +19519,15 @@
           </a:p>
           <a:p>
             <a:r>
-              <a:rPr lang="it-IT" dirty="0"/>
-              <a:t>Nel caso in cui vengano individuate due zone luminose il loro punto medio viene disegnato a schermo come quadrato rosso. La dimensione relativa delle due zone luminose viene utilizzata per calcolare e visualizzare un’approssimazione del puntatore (quadrato bianco) che tenga conto della prospettiva. </a:t>
+              <a:rPr lang="en-US" dirty="0"/>
+              <a:t>If two bright areas are identified, their midpoint is drawn on the screen as a red square. The relative size of the two highlights is used to calculate and display a pointer approximation (white square) that takes perspective into account. </a:t>
             </a:r>
           </a:p>
           <a:p>
             <a:r>
-              <a:rPr lang="it-IT" dirty="0"/>
-              <a:t>Infatti se una zona luminosa che si trova a destra risulta essere più grande di una a sinistra il puntatore deve essere spostato più verso sinistra; viceversa se la zona luminosa a sinistra dell’immagine è più grande di quella a destra allora si può spostare il puntatore più verso destra.</a:t>
+              <a:rPr lang="en-US" dirty="0"/>
+              <a:t>
+In fact, if a bright area on the right is larger than one on the left, the pointer must be moved more to the left; vice versa, if the bright area on the left of the image is larger than the one on the right, then you can move the pointer more to the right.</a:t>
             </a:r>
           </a:p>
           <a:p>
@@ -19577,9 +19535,10 @@
           </a:p>
           <a:p>
             <a:r>
-              <a:rPr lang="it-IT" dirty="0"/>
-              <a:t>Per quanto riguarda l’aspetto implementativo è stata realizzata un’interruzione sulla ricezione mediante UART. In questa interruzione per prima cosa vengono colorate di nero le zone occupate precedentemente dai puntatori, dopodiché vengono estratte e convertite le informazioni ricevute dall’HC-05 e infine dopo i necessari calcoli vengono disegnati i nuovi puntatori.</a:t>
+              <a:rPr lang="en-US" dirty="0"/>
+              <a:t>As far as the implementation aspect is concerned, an interruption has been made on reception through UART. In this interruption, the areas previously occupied by the pointers are first colored black, then the information received from the HC-05 is extracted and converted, and finally, after the necessary calculations, the new pointers are drawn.</a:t>
             </a:r>
+            <a:endParaRPr lang="it-IT" dirty="0"/>
           </a:p>
         </p:txBody>
       </p:sp>
@@ -19786,14 +19745,13 @@
           </a:bodyPr>
           <a:lstStyle/>
           <a:p>
-            <a:pPr rtl="0"/>
             <a:r>
               <a:rPr lang="it-IT" sz="7200" b="1" dirty="0">
                 <a:solidFill>
                   <a:schemeClr val="bg1"/>
                 </a:solidFill>
               </a:rPr>
-              <a:t>Grazie</a:t>
+              <a:t>Thank you</a:t>
             </a:r>
             <a:endParaRPr lang="it-IT" sz="7200" dirty="0">
               <a:solidFill>
@@ -19962,7 +19920,18 @@
             </a:lvl1pPr>
           </a:lstStyle>
           <a:p>
-            <a:pPr algn="ctr" rtl="0"/>
+            <a:pPr algn="ctr"/>
+            <a:r>
+              <a:rPr lang="it-IT" sz="2000" b="1" dirty="0" err="1">
+                <a:solidFill>
+                  <a:schemeClr val="tx1">
+                    <a:lumMod val="75000"/>
+                    <a:lumOff val="25000"/>
+                  </a:schemeClr>
+                </a:solidFill>
+              </a:rPr>
+              <a:t>Initial</a:t>
+            </a:r>
             <a:r>
               <a:rPr lang="it-IT" sz="2000" b="1" dirty="0">
                 <a:solidFill>
@@ -19972,7 +19941,18 @@
                   </a:schemeClr>
                 </a:solidFill>
               </a:rPr>
-              <a:t>Idea iniziale e ispirazione</a:t>
+              <a:t> idea and </a:t>
+            </a:r>
+            <a:r>
+              <a:rPr lang="it-IT" sz="2000" b="1" dirty="0" err="1">
+                <a:solidFill>
+                  <a:schemeClr val="tx1">
+                    <a:lumMod val="75000"/>
+                    <a:lumOff val="25000"/>
+                  </a:schemeClr>
+                </a:solidFill>
+              </a:rPr>
+              <a:t>inspiration</a:t>
             </a:r>
             <a:endParaRPr lang="it-IT" sz="2000" dirty="0">
               <a:solidFill>
@@ -20049,7 +20029,7 @@
         <p:spPr>
           <a:xfrm>
             <a:off x="94891" y="690113"/>
-            <a:ext cx="12097109" cy="923330"/>
+            <a:ext cx="12097109" cy="646331"/>
           </a:xfrm>
           <a:prstGeom prst="rect">
             <a:avLst/>
@@ -20063,17 +20043,18 @@
           <a:lstStyle/>
           <a:p>
             <a:r>
-              <a:rPr lang="it-IT" dirty="0"/>
-              <a:t>L’idea iniziale è stata quella di collegare il telecomando della console Wii (noto come </a:t>
+              <a:rPr lang="en-US" dirty="0"/>
+              <a:t>The initial idea was to attach the Wii console's remote control (known as </a:t>
             </a:r>
             <a:r>
-              <a:rPr lang="it-IT" dirty="0" err="1"/>
+              <a:rPr lang="en-US" dirty="0" err="1"/>
               <a:t>Wiimote</a:t>
             </a:r>
             <a:r>
-              <a:rPr lang="it-IT" dirty="0"/>
-              <a:t>) e utilizzarne le rilevazioni basate sugli infrarossi per visualizzare un puntatore su un display collegato alla scheda STM32. Quest’idea iniziale presentava alcuni punti positivi e negativi.</a:t>
+              <a:rPr lang="en-US" dirty="0"/>
+              <a:t>) and use its infrared-based readings to display a pointer on a display connected to the STM32 board. This initial idea had some positive and negative points.</a:t>
             </a:r>
+            <a:endParaRPr lang="it-IT" dirty="0"/>
           </a:p>
         </p:txBody>
       </p:sp>
@@ -20126,12 +20107,12 @@
           <a:bodyPr rtlCol="0" anchor="ctr"/>
           <a:lstStyle/>
           <a:p>
-            <a:pPr algn="ctr" rtl="0"/>
+            <a:pPr algn="ctr"/>
             <a:r>
               <a:rPr lang="it-IT" b="1" dirty="0">
                 <a:latin typeface="+mj-lt"/>
               </a:rPr>
-              <a:t>POSITIVI</a:t>
+              <a:t>POSITIVE</a:t>
             </a:r>
           </a:p>
         </p:txBody>
@@ -20185,12 +20166,12 @@
           <a:bodyPr rtlCol="0" anchor="ctr"/>
           <a:lstStyle/>
           <a:p>
-            <a:pPr algn="ctr" rtl="0"/>
+            <a:pPr algn="ctr"/>
             <a:r>
               <a:rPr lang="it-IT" b="1" dirty="0">
                 <a:latin typeface="+mj-lt"/>
               </a:rPr>
-              <a:t>NEGATIVI</a:t>
+              <a:t>NEGATIVES</a:t>
             </a:r>
           </a:p>
         </p:txBody>
@@ -20210,7 +20191,7 @@
         <p:spPr>
           <a:xfrm>
             <a:off x="1433992" y="3497554"/>
-            <a:ext cx="4162870" cy="1661993"/>
+            <a:ext cx="4162870" cy="1446550"/>
           </a:xfrm>
           <a:prstGeom prst="rect">
             <a:avLst/>
@@ -20222,7 +20203,7 @@
           </a:bodyPr>
           <a:lstStyle/>
           <a:p>
-            <a:pPr marL="171450" indent="-171450" rtl="0">
+            <a:pPr marL="171450" indent="-171450">
               <a:spcBef>
                 <a:spcPts val="1200"/>
               </a:spcBef>
@@ -20233,7 +20214,7 @@
               <a:buChar char="›"/>
             </a:pPr>
             <a:r>
-              <a:rPr lang="it-IT" sz="1400" dirty="0">
+              <a:rPr lang="en-US" sz="1400" dirty="0">
                 <a:solidFill>
                   <a:schemeClr val="tx1">
                     <a:lumMod val="75000"/>
@@ -20242,10 +20223,10 @@
                 </a:solidFill>
                 <a:cs typeface="Segoe UI" panose="020B0502040204020203" pitchFamily="34" charset="0"/>
               </a:rPr>
-              <a:t>Il </a:t>
+              <a:t>The </a:t>
             </a:r>
             <a:r>
-              <a:rPr lang="it-IT" sz="1400" dirty="0" err="1">
+              <a:rPr lang="en-US" sz="1400" dirty="0" err="1">
                 <a:solidFill>
                   <a:schemeClr val="tx1">
                     <a:lumMod val="75000"/>
@@ -20257,7 +20238,7 @@
               <a:t>Wiimote</a:t>
             </a:r>
             <a:r>
-              <a:rPr lang="it-IT" sz="1400" dirty="0">
+              <a:rPr lang="en-US" sz="1400" dirty="0">
                 <a:solidFill>
                   <a:schemeClr val="tx1">
                     <a:lumMod val="75000"/>
@@ -20266,34 +20247,11 @@
                 </a:solidFill>
                 <a:cs typeface="Segoe UI" panose="020B0502040204020203" pitchFamily="34" charset="0"/>
               </a:rPr>
-              <a:t> essendo dotato di hardware dedicato è in grado di offrire una precisione del puntatore notevole nonché bassi consumi.</a:t>
-            </a:r>
-          </a:p>
-          <a:p>
-            <a:pPr marL="171450" indent="-171450" rtl="0">
-              <a:spcBef>
-                <a:spcPts val="1200"/>
-              </a:spcBef>
-              <a:buClr>
-                <a:schemeClr val="tx2"/>
-              </a:buClr>
-              <a:buFont typeface="Segoe UI Light" panose="020B0502040204020203" pitchFamily="34" charset="0"/>
-              <a:buChar char="›"/>
-            </a:pPr>
-            <a:r>
-              <a:rPr lang="it-IT" sz="1400" dirty="0">
-                <a:solidFill>
-                  <a:schemeClr val="tx1">
-                    <a:lumMod val="75000"/>
-                    <a:lumOff val="25000"/>
-                  </a:schemeClr>
-                </a:solidFill>
-                <a:cs typeface="Segoe UI" panose="020B0502040204020203" pitchFamily="34" charset="0"/>
-              </a:rPr>
-              <a:t>Il </a:t>
+              <a:t>, being equipped with dedicated hardware, is able to offer remarkable pointer precision as well as low consumption.
+The </a:t>
             </a:r>
             <a:r>
-              <a:rPr lang="it-IT" sz="1400" dirty="0" err="1">
+              <a:rPr lang="en-US" sz="1400" dirty="0" err="1">
                 <a:solidFill>
                   <a:schemeClr val="tx1">
                     <a:lumMod val="75000"/>
@@ -20305,7 +20263,7 @@
               <a:t>Wiimote</a:t>
             </a:r>
             <a:r>
-              <a:rPr lang="it-IT" sz="1400" dirty="0">
+              <a:rPr lang="en-US" sz="1400" dirty="0">
                 <a:solidFill>
                   <a:schemeClr val="tx1">
                     <a:lumMod val="75000"/>
@@ -20314,8 +20272,17 @@
                 </a:solidFill>
                 <a:cs typeface="Segoe UI" panose="020B0502040204020203" pitchFamily="34" charset="0"/>
               </a:rPr>
-              <a:t> è in grado di proiettare un puntatore anche tenendo conto della prospettiva e non necessita un posizionamento perfettamente frontale dell’utilizzatore</a:t>
+              <a:t> is able to project a pointer also taking into account the perspective and does not require a perfectly frontal positioning of the user</a:t>
             </a:r>
+            <a:endParaRPr lang="it-IT" sz="1400" dirty="0">
+              <a:solidFill>
+                <a:schemeClr val="tx1">
+                  <a:lumMod val="75000"/>
+                  <a:lumOff val="25000"/>
+                </a:schemeClr>
+              </a:solidFill>
+              <a:cs typeface="Segoe UI" panose="020B0502040204020203" pitchFamily="34" charset="0"/>
+            </a:endParaRPr>
           </a:p>
         </p:txBody>
       </p:sp>
@@ -20346,7 +20313,7 @@
           </a:bodyPr>
           <a:lstStyle/>
           <a:p>
-            <a:pPr marL="171450" indent="-171450" rtl="0">
+            <a:pPr marL="171450" indent="-171450">
               <a:spcBef>
                 <a:spcPts val="1200"/>
               </a:spcBef>
@@ -20357,7 +20324,7 @@
               <a:buChar char="›"/>
             </a:pPr>
             <a:r>
-              <a:rPr lang="it-IT" sz="1400" dirty="0">
+              <a:rPr lang="en-US" sz="1400" dirty="0">
                 <a:solidFill>
                   <a:schemeClr val="tx1">
                     <a:lumMod val="75000"/>
@@ -20366,22 +20333,10 @@
                 </a:solidFill>
                 <a:cs typeface="Segoe UI" panose="020B0502040204020203" pitchFamily="34" charset="0"/>
               </a:rPr>
-              <a:t>L’utilizzo di questo profilo dello standard Bluetooth prevede l’utilizzo di driver complessi in congiunzione all’uso di sistemi operativi come FreeRTOS.</a:t>
+              <a:t>The use of this profile of the Bluetooth standard involves the use of complex drivers in conjunction with the use of operating systems such as </a:t>
             </a:r>
-          </a:p>
-          <a:p>
-            <a:pPr marL="171450" indent="-171450" rtl="0">
-              <a:spcBef>
-                <a:spcPts val="1200"/>
-              </a:spcBef>
-              <a:buClr>
-                <a:schemeClr val="tx2"/>
-              </a:buClr>
-              <a:buFont typeface="Segoe UI Light" panose="020B0502040204020203" pitchFamily="34" charset="0"/>
-              <a:buChar char="›"/>
-            </a:pPr>
             <a:r>
-              <a:rPr lang="it-IT" sz="1400" dirty="0">
+              <a:rPr lang="en-US" sz="1400" dirty="0" err="1">
                 <a:solidFill>
                   <a:schemeClr val="tx1">
                     <a:lumMod val="75000"/>
@@ -20390,8 +20345,30 @@
                 </a:solidFill>
                 <a:cs typeface="Segoe UI" panose="020B0502040204020203" pitchFamily="34" charset="0"/>
               </a:rPr>
-              <a:t>In commercio le schede Bluetooth in grado di supportare il profilo HID sono molto costose. Gli adattatori compatibili con il budget e l’hardware a disposizione supportano il solo profilo seriale.</a:t>
+              <a:t>FreeRTOS</a:t>
             </a:r>
+            <a:r>
+              <a:rPr lang="en-US" sz="1400" dirty="0">
+                <a:solidFill>
+                  <a:schemeClr val="tx1">
+                    <a:lumMod val="75000"/>
+                    <a:lumOff val="25000"/>
+                  </a:schemeClr>
+                </a:solidFill>
+                <a:cs typeface="Segoe UI" panose="020B0502040204020203" pitchFamily="34" charset="0"/>
+              </a:rPr>
+              <a:t>.
+Bluetooth cards that support the HID profile are very expensive on the market. Adapters that are compatible with your budget and hardware support serial profile only.</a:t>
+            </a:r>
+            <a:endParaRPr lang="it-IT" sz="1400" dirty="0">
+              <a:solidFill>
+                <a:schemeClr val="tx1">
+                  <a:lumMod val="75000"/>
+                  <a:lumOff val="25000"/>
+                </a:schemeClr>
+              </a:solidFill>
+              <a:cs typeface="Segoe UI" panose="020B0502040204020203" pitchFamily="34" charset="0"/>
+            </a:endParaRPr>
           </a:p>
         </p:txBody>
       </p:sp>
@@ -20422,7 +20399,6 @@
           </a:bodyPr>
           <a:lstStyle/>
           <a:p>
-            <a:pPr rtl="0"/>
             <a:r>
               <a:rPr lang="it-IT" sz="1600" b="1" dirty="0">
                 <a:solidFill>
@@ -20433,7 +20409,31 @@
                 </a:solidFill>
                 <a:cs typeface="Segoe UI" panose="020B0502040204020203" pitchFamily="34" charset="0"/>
               </a:rPr>
-              <a:t>Precisione, qualità e prestazioni</a:t>
+              <a:t>Precision, </a:t>
+            </a:r>
+            <a:r>
+              <a:rPr lang="it-IT" sz="1600" b="1" dirty="0" err="1">
+                <a:solidFill>
+                  <a:schemeClr val="tx1">
+                    <a:lumMod val="75000"/>
+                    <a:lumOff val="25000"/>
+                  </a:schemeClr>
+                </a:solidFill>
+                <a:cs typeface="Segoe UI" panose="020B0502040204020203" pitchFamily="34" charset="0"/>
+              </a:rPr>
+              <a:t>quality</a:t>
+            </a:r>
+            <a:r>
+              <a:rPr lang="it-IT" sz="1600" b="1" dirty="0">
+                <a:solidFill>
+                  <a:schemeClr val="tx1">
+                    <a:lumMod val="75000"/>
+                    <a:lumOff val="25000"/>
+                  </a:schemeClr>
+                </a:solidFill>
+                <a:cs typeface="Segoe UI" panose="020B0502040204020203" pitchFamily="34" charset="0"/>
+              </a:rPr>
+              <a:t> and performance</a:t>
             </a:r>
           </a:p>
         </p:txBody>
@@ -20465,9 +20465,8 @@
           </a:bodyPr>
           <a:lstStyle/>
           <a:p>
-            <a:pPr rtl="0"/>
             <a:r>
-              <a:rPr lang="it-IT" sz="1600" b="1" dirty="0">
+              <a:rPr lang="en-US" sz="1600" b="1" dirty="0">
                 <a:solidFill>
                   <a:schemeClr val="tx1">
                     <a:lumMod val="75000"/>
@@ -20476,8 +20475,17 @@
                 </a:solidFill>
                 <a:cs typeface="Segoe UI" panose="020B0502040204020203" pitchFamily="34" charset="0"/>
               </a:rPr>
-              <a:t>Profilo HID (Human Interface Device) dello standard Bluetooth</a:t>
+              <a:t>Bluetooth Standard Human Interface Device (HID) Profile</a:t>
             </a:r>
+            <a:endParaRPr lang="it-IT" sz="1600" b="1" dirty="0">
+              <a:solidFill>
+                <a:schemeClr val="tx1">
+                  <a:lumMod val="75000"/>
+                  <a:lumOff val="25000"/>
+                </a:schemeClr>
+              </a:solidFill>
+              <a:cs typeface="Segoe UI" panose="020B0502040204020203" pitchFamily="34" charset="0"/>
+            </a:endParaRPr>
           </a:p>
         </p:txBody>
       </p:sp>
@@ -20795,7 +20803,7 @@
         <p:spPr>
           <a:xfrm>
             <a:off x="47445" y="2844225"/>
-            <a:ext cx="12097109" cy="830997"/>
+            <a:ext cx="12097109" cy="800219"/>
           </a:xfrm>
           <a:prstGeom prst="rect">
             <a:avLst/>
@@ -20816,7 +20824,25 @@
                 </a:solidFill>
                 <a:latin typeface="+mj-lt"/>
               </a:rPr>
-              <a:t>Soluzione: ricreare il </a:t>
+              <a:t>Solution: </a:t>
+            </a:r>
+            <a:r>
+              <a:rPr lang="it-IT" sz="3200" b="1" dirty="0" err="1">
+                <a:solidFill>
+                  <a:schemeClr val="accent4"/>
+                </a:solidFill>
+                <a:latin typeface="+mj-lt"/>
+              </a:rPr>
+              <a:t>Recreate</a:t>
+            </a:r>
+            <a:r>
+              <a:rPr lang="it-IT" sz="3200" b="1" dirty="0">
+                <a:solidFill>
+                  <a:schemeClr val="accent4"/>
+                </a:solidFill>
+                <a:latin typeface="+mj-lt"/>
+              </a:rPr>
+              <a:t> the </a:t>
             </a:r>
             <a:r>
               <a:rPr lang="it-IT" sz="3200" b="1" dirty="0" err="1">
@@ -20843,7 +20869,7 @@
                 </a:solidFill>
                 <a:latin typeface="+mj-lt"/>
               </a:rPr>
-              <a:t>(in parte…)</a:t>
+              <a:t>(in part...)</a:t>
             </a:r>
             <a:endParaRPr lang="it-IT" sz="1400" dirty="0">
               <a:solidFill>
@@ -20983,7 +21009,7 @@
         <p:spPr>
           <a:xfrm>
             <a:off x="228600" y="190500"/>
-            <a:ext cx="11734800" cy="775597"/>
+            <a:ext cx="11734800" cy="387798"/>
           </a:xfrm>
           <a:prstGeom prst="rect">
             <a:avLst/>
@@ -21013,7 +21039,7 @@
             </a:lvl1pPr>
           </a:lstStyle>
           <a:p>
-            <a:pPr algn="ctr" rtl="0"/>
+            <a:pPr algn="ctr"/>
             <a:r>
               <a:rPr lang="it-IT" sz="2800" b="1" dirty="0">
                 <a:solidFill>
@@ -21023,18 +21049,8 @@
                   </a:schemeClr>
                 </a:solidFill>
               </a:rPr>
-              <a:t>Come funziona</a:t>
+              <a:t>How it works</a:t>
             </a:r>
-            <a:br>
-              <a:rPr lang="it-IT" sz="2800" dirty="0">
-                <a:solidFill>
-                  <a:schemeClr val="tx1">
-                    <a:lumMod val="75000"/>
-                    <a:lumOff val="25000"/>
-                  </a:schemeClr>
-                </a:solidFill>
-              </a:rPr>
-            </a:br>
             <a:endParaRPr lang="it-IT" sz="2800" dirty="0">
               <a:solidFill>
                 <a:schemeClr val="tx1">
@@ -21169,7 +21185,7 @@
           </a:bodyPr>
           <a:lstStyle/>
           <a:p>
-            <a:pPr rtl="0">
+            <a:pPr>
               <a:spcBef>
                 <a:spcPts val="1200"/>
               </a:spcBef>
@@ -21178,7 +21194,7 @@
               </a:buClr>
             </a:pPr>
             <a:r>
-              <a:rPr lang="it-IT" sz="1400" dirty="0">
+              <a:rPr lang="en-US" sz="1400" dirty="0">
                 <a:solidFill>
                   <a:schemeClr val="tx1">
                     <a:lumMod val="75000"/>
@@ -21187,10 +21203,10 @@
                 </a:solidFill>
                 <a:cs typeface="Segoe UI" panose="020B0502040204020203" pitchFamily="34" charset="0"/>
               </a:rPr>
-              <a:t>Il </a:t>
+              <a:t>The </a:t>
             </a:r>
             <a:r>
-              <a:rPr lang="it-IT" sz="1400" dirty="0" err="1">
+              <a:rPr lang="en-US" sz="1400" dirty="0" err="1">
                 <a:solidFill>
                   <a:schemeClr val="tx1">
                     <a:lumMod val="75000"/>
@@ -21202,7 +21218,7 @@
               <a:t>Wiimote</a:t>
             </a:r>
             <a:r>
-              <a:rPr lang="it-IT" sz="1400" dirty="0">
+              <a:rPr lang="en-US" sz="1400" dirty="0">
                 <a:solidFill>
                   <a:schemeClr val="tx1">
                     <a:lumMod val="75000"/>
@@ -21211,198 +21227,24 @@
                 </a:solidFill>
                 <a:cs typeface="Segoe UI" panose="020B0502040204020203" pitchFamily="34" charset="0"/>
               </a:rPr>
-              <a:t> è dotato di una suite di sensori e dispositivi tra i quali:</a:t>
+              <a:t> is equipped with a suite of sensors and devices including:
+A low-resolution monochrome camera (128x96) placed behind an infrared filter attached to the remote control housing.
+A three-dimensional accelerometer.
+A speaker.
+A vibration motor.
+Some buttons for gaming functions.
+Bluetooth connectivity (IEEE 802.15.1).
+In addition, there is an Image Signal Processor (ISP) that uses camera detections to derive the position of the pointer.</a:t>
             </a:r>
-          </a:p>
-          <a:p>
-            <a:pPr marL="171450" indent="-171450" rtl="0">
-              <a:spcBef>
-                <a:spcPts val="1200"/>
-              </a:spcBef>
-              <a:buClr>
-                <a:schemeClr val="tx2"/>
-              </a:buClr>
-              <a:buFont typeface="Segoe UI Light" panose="020B0502040204020203" pitchFamily="34" charset="0"/>
-              <a:buChar char="›"/>
-            </a:pPr>
-            <a:r>
-              <a:rPr lang="it-IT" sz="1400" dirty="0">
-                <a:solidFill>
-                  <a:schemeClr val="tx1">
-                    <a:lumMod val="75000"/>
-                    <a:lumOff val="25000"/>
-                  </a:schemeClr>
-                </a:solidFill>
-                <a:cs typeface="Segoe UI" panose="020B0502040204020203" pitchFamily="34" charset="0"/>
-              </a:rPr>
-              <a:t>Una fotocamera monocromatica a bassa risoluzione (128x96) posta dietro a un filtro infrarossi fissato all’housing del telecomando.</a:t>
-            </a:r>
-          </a:p>
-          <a:p>
-            <a:pPr marL="171450" indent="-171450" rtl="0">
-              <a:spcBef>
-                <a:spcPts val="1200"/>
-              </a:spcBef>
-              <a:buClr>
-                <a:schemeClr val="tx2"/>
-              </a:buClr>
-              <a:buFont typeface="Segoe UI Light" panose="020B0502040204020203" pitchFamily="34" charset="0"/>
-              <a:buChar char="›"/>
-            </a:pPr>
-            <a:r>
-              <a:rPr lang="it-IT" sz="1400" dirty="0">
-                <a:solidFill>
-                  <a:schemeClr val="tx1">
-                    <a:lumMod val="75000"/>
-                    <a:lumOff val="25000"/>
-                  </a:schemeClr>
-                </a:solidFill>
-                <a:cs typeface="Segoe UI" panose="020B0502040204020203" pitchFamily="34" charset="0"/>
-              </a:rPr>
-              <a:t>Un accelerometro tridimensionale.</a:t>
-            </a:r>
-          </a:p>
-          <a:p>
-            <a:pPr marL="171450" indent="-171450" rtl="0">
-              <a:spcBef>
-                <a:spcPts val="1200"/>
-              </a:spcBef>
-              <a:buClr>
-                <a:schemeClr val="tx2"/>
-              </a:buClr>
-              <a:buFont typeface="Segoe UI Light" panose="020B0502040204020203" pitchFamily="34" charset="0"/>
-              <a:buChar char="›"/>
-            </a:pPr>
-            <a:r>
-              <a:rPr lang="it-IT" sz="1400" dirty="0">
-                <a:solidFill>
-                  <a:schemeClr val="tx1">
-                    <a:lumMod val="75000"/>
-                    <a:lumOff val="25000"/>
-                  </a:schemeClr>
-                </a:solidFill>
-                <a:cs typeface="Segoe UI" panose="020B0502040204020203" pitchFamily="34" charset="0"/>
-              </a:rPr>
-              <a:t>Uno speaker.</a:t>
-            </a:r>
-          </a:p>
-          <a:p>
-            <a:pPr marL="171450" indent="-171450" rtl="0">
-              <a:spcBef>
-                <a:spcPts val="1200"/>
-              </a:spcBef>
-              <a:buClr>
-                <a:schemeClr val="tx2"/>
-              </a:buClr>
-              <a:buFont typeface="Segoe UI Light" panose="020B0502040204020203" pitchFamily="34" charset="0"/>
-              <a:buChar char="›"/>
-            </a:pPr>
-            <a:r>
-              <a:rPr lang="it-IT" sz="1400" dirty="0">
-                <a:solidFill>
-                  <a:schemeClr val="tx1">
-                    <a:lumMod val="75000"/>
-                    <a:lumOff val="25000"/>
-                  </a:schemeClr>
-                </a:solidFill>
-                <a:cs typeface="Segoe UI" panose="020B0502040204020203" pitchFamily="34" charset="0"/>
-              </a:rPr>
-              <a:t>Un motore per la vibrazione.</a:t>
-            </a:r>
-          </a:p>
-          <a:p>
-            <a:pPr marL="171450" indent="-171450" rtl="0">
-              <a:spcBef>
-                <a:spcPts val="1200"/>
-              </a:spcBef>
-              <a:buClr>
-                <a:schemeClr val="tx2"/>
-              </a:buClr>
-              <a:buFont typeface="Segoe UI Light" panose="020B0502040204020203" pitchFamily="34" charset="0"/>
-              <a:buChar char="›"/>
-            </a:pPr>
-            <a:r>
-              <a:rPr lang="it-IT" sz="1400" dirty="0">
-                <a:solidFill>
-                  <a:schemeClr val="tx1">
-                    <a:lumMod val="75000"/>
-                    <a:lumOff val="25000"/>
-                  </a:schemeClr>
-                </a:solidFill>
-                <a:cs typeface="Segoe UI" panose="020B0502040204020203" pitchFamily="34" charset="0"/>
-              </a:rPr>
-              <a:t>Alcuni pulsanti per le funzioni di gioco.</a:t>
-            </a:r>
-          </a:p>
-          <a:p>
-            <a:pPr marL="171450" indent="-171450" rtl="0">
-              <a:spcBef>
-                <a:spcPts val="1200"/>
-              </a:spcBef>
-              <a:buClr>
-                <a:schemeClr val="tx2"/>
-              </a:buClr>
-              <a:buFont typeface="Segoe UI Light" panose="020B0502040204020203" pitchFamily="34" charset="0"/>
-              <a:buChar char="›"/>
-            </a:pPr>
-            <a:r>
-              <a:rPr lang="it-IT" sz="1400" dirty="0">
-                <a:solidFill>
-                  <a:schemeClr val="tx1">
-                    <a:lumMod val="75000"/>
-                    <a:lumOff val="25000"/>
-                  </a:schemeClr>
-                </a:solidFill>
-                <a:cs typeface="Segoe UI" panose="020B0502040204020203" pitchFamily="34" charset="0"/>
-              </a:rPr>
-              <a:t>Connettività Bluetooth (IEEE 802.15.1).</a:t>
-            </a:r>
-          </a:p>
-          <a:p>
-            <a:pPr rtl="0">
-              <a:spcBef>
-                <a:spcPts val="1200"/>
-              </a:spcBef>
-              <a:buClr>
-                <a:schemeClr val="tx2"/>
-              </a:buClr>
-            </a:pPr>
-            <a:r>
-              <a:rPr lang="it-IT" sz="1400" dirty="0">
-                <a:solidFill>
-                  <a:schemeClr val="tx1">
-                    <a:lumMod val="75000"/>
-                    <a:lumOff val="25000"/>
-                  </a:schemeClr>
-                </a:solidFill>
-                <a:cs typeface="Segoe UI" panose="020B0502040204020203" pitchFamily="34" charset="0"/>
-              </a:rPr>
-              <a:t>Inoltre è presente un Image </a:t>
-            </a:r>
-            <a:r>
-              <a:rPr lang="it-IT" sz="1400" dirty="0" err="1">
-                <a:solidFill>
-                  <a:schemeClr val="tx1">
-                    <a:lumMod val="75000"/>
-                    <a:lumOff val="25000"/>
-                  </a:schemeClr>
-                </a:solidFill>
-                <a:cs typeface="Segoe UI" panose="020B0502040204020203" pitchFamily="34" charset="0"/>
-              </a:rPr>
-              <a:t>Signal</a:t>
-            </a:r>
-            <a:r>
-              <a:rPr lang="it-IT" sz="1400" dirty="0">
-                <a:solidFill>
-                  <a:schemeClr val="tx1">
-                    <a:lumMod val="75000"/>
-                    <a:lumOff val="25000"/>
-                  </a:schemeClr>
-                </a:solidFill>
-                <a:cs typeface="Segoe UI" panose="020B0502040204020203" pitchFamily="34" charset="0"/>
-              </a:rPr>
-              <a:t> Processor (ISP) che utilizza le rivelazione della fotocamera per ricavare la posizione del puntatore.</a:t>
-            </a:r>
+            <a:endParaRPr lang="it-IT" sz="1400" dirty="0">
+              <a:solidFill>
+                <a:schemeClr val="tx1">
+                  <a:lumMod val="75000"/>
+                  <a:lumOff val="25000"/>
+                </a:schemeClr>
+              </a:solidFill>
+              <a:cs typeface="Segoe UI" panose="020B0502040204020203" pitchFamily="34" charset="0"/>
+            </a:endParaRPr>
           </a:p>
         </p:txBody>
       </p:sp>
@@ -21480,7 +21322,7 @@
           </a:bodyPr>
           <a:lstStyle/>
           <a:p>
-            <a:pPr rtl="0">
+            <a:pPr>
               <a:spcBef>
                 <a:spcPts val="1200"/>
               </a:spcBef>
@@ -21489,7 +21331,7 @@
               </a:buClr>
             </a:pPr>
             <a:r>
-              <a:rPr lang="it-IT" sz="1400" dirty="0">
+              <a:rPr lang="en-US" sz="1400" dirty="0">
                 <a:solidFill>
                   <a:schemeClr val="tx1">
                     <a:lumMod val="75000"/>
@@ -21498,34 +21340,10 @@
                 </a:solidFill>
                 <a:cs typeface="Segoe UI" panose="020B0502040204020203" pitchFamily="34" charset="0"/>
               </a:rPr>
-              <a:t>La console ha in dotazione anche una «</a:t>
+              <a:t>The console also comes with a "sensor bar" to be placed below or above the screen. Despite the name, it does not include any sensor but only 940 nm infrared LEDs placed at the end that serve as a reference for the </a:t>
             </a:r>
             <a:r>
-              <a:rPr lang="it-IT" sz="1400" dirty="0" err="1">
-                <a:solidFill>
-                  <a:schemeClr val="tx1">
-                    <a:lumMod val="75000"/>
-                    <a:lumOff val="25000"/>
-                  </a:schemeClr>
-                </a:solidFill>
-                <a:cs typeface="Segoe UI" panose="020B0502040204020203" pitchFamily="34" charset="0"/>
-              </a:rPr>
-              <a:t>sensor</a:t>
-            </a:r>
-            <a:r>
-              <a:rPr lang="it-IT" sz="1400" dirty="0">
-                <a:solidFill>
-                  <a:schemeClr val="tx1">
-                    <a:lumMod val="75000"/>
-                    <a:lumOff val="25000"/>
-                  </a:schemeClr>
-                </a:solidFill>
-                <a:cs typeface="Segoe UI" panose="020B0502040204020203" pitchFamily="34" charset="0"/>
-              </a:rPr>
-              <a:t> bar» da piazzare sotto o sopra allo schermo. A dispetto del nome non include alcun sensore ma solamente dei LED infrarossi a 940 nm posti all’estremità che servono come riferimento per il </a:t>
-            </a:r>
-            <a:r>
-              <a:rPr lang="it-IT" sz="1400" dirty="0" err="1">
+              <a:rPr lang="en-US" sz="1400" dirty="0" err="1">
                 <a:solidFill>
                   <a:schemeClr val="tx1">
                     <a:lumMod val="75000"/>
@@ -21537,7 +21355,7 @@
               <a:t>Wiimote</a:t>
             </a:r>
             <a:r>
-              <a:rPr lang="it-IT" sz="1400" dirty="0">
+              <a:rPr lang="en-US" sz="1400" dirty="0">
                 <a:solidFill>
                   <a:schemeClr val="tx1">
                     <a:lumMod val="75000"/>
@@ -21548,6 +21366,15 @@
               </a:rPr>
               <a:t>.</a:t>
             </a:r>
+            <a:endParaRPr lang="it-IT" sz="1400" dirty="0">
+              <a:solidFill>
+                <a:schemeClr val="tx1">
+                  <a:lumMod val="75000"/>
+                  <a:lumOff val="25000"/>
+                </a:schemeClr>
+              </a:solidFill>
+              <a:cs typeface="Segoe UI" panose="020B0502040204020203" pitchFamily="34" charset="0"/>
+            </a:endParaRPr>
           </a:p>
         </p:txBody>
       </p:sp>
@@ -21680,7 +21507,7 @@
         <p:spPr>
           <a:xfrm>
             <a:off x="228600" y="190500"/>
-            <a:ext cx="11734800" cy="775597"/>
+            <a:ext cx="11734800" cy="387798"/>
           </a:xfrm>
           <a:prstGeom prst="rect">
             <a:avLst/>
@@ -21710,7 +21537,7 @@
             </a:lvl1pPr>
           </a:lstStyle>
           <a:p>
-            <a:pPr algn="ctr" rtl="0"/>
+            <a:pPr algn="ctr"/>
             <a:r>
               <a:rPr lang="it-IT" sz="2800" b="1" dirty="0">
                 <a:solidFill>
@@ -21720,10 +21547,10 @@
                   </a:schemeClr>
                 </a:solidFill>
               </a:rPr>
-              <a:t>Hardware utilizzato</a:t>
+              <a:t>Hardware </a:t>
             </a:r>
-            <a:br>
-              <a:rPr lang="it-IT" sz="2800" dirty="0">
+            <a:r>
+              <a:rPr lang="it-IT" sz="2800" b="1" dirty="0" err="1">
                 <a:solidFill>
                   <a:schemeClr val="tx1">
                     <a:lumMod val="75000"/>
@@ -21731,7 +21558,8 @@
                   </a:schemeClr>
                 </a:solidFill>
               </a:rPr>
-            </a:br>
+              <a:t>used</a:t>
+            </a:r>
             <a:endParaRPr lang="it-IT" sz="2800" dirty="0">
               <a:solidFill>
                 <a:schemeClr val="tx1">
@@ -21901,7 +21729,7 @@
         <p:spPr>
           <a:xfrm>
             <a:off x="3300820" y="966097"/>
-            <a:ext cx="8155059" cy="2369880"/>
+            <a:ext cx="8155059" cy="1815882"/>
           </a:xfrm>
           <a:prstGeom prst="rect">
             <a:avLst/>
@@ -21913,7 +21741,7 @@
           </a:bodyPr>
           <a:lstStyle/>
           <a:p>
-            <a:pPr rtl="0">
+            <a:pPr>
               <a:spcBef>
                 <a:spcPts val="1200"/>
               </a:spcBef>
@@ -21922,7 +21750,7 @@
               </a:buClr>
             </a:pPr>
             <a:r>
-              <a:rPr lang="it-IT" dirty="0">
+              <a:rPr lang="en-US" dirty="0">
                 <a:solidFill>
                   <a:schemeClr val="tx1">
                     <a:lumMod val="75000"/>
@@ -21931,11 +21759,11 @@
                 </a:solidFill>
                 <a:cs typeface="Segoe UI" panose="020B0502040204020203" pitchFamily="34" charset="0"/>
               </a:rPr>
-              <a:t>La maggior parte degli smartphone in commercio posseggono fotocamere in grado di catturare la luce dei LED IR a 940nm, grazie alla connettività Bluetooth e alla capacità di elaborazione delle immagini è possibile usare uno smartphone come dispositivo di puntamento.</a:t>
+              <a:t>Most smartphones on the market have cameras capable of capturing the light of 940nm IR LEDs, thanks to Bluetooth connectivity and image processing capacity it is possible to use a smartphone as a pointing device.</a:t>
             </a:r>
           </a:p>
           <a:p>
-            <a:pPr rtl="0">
+            <a:pPr>
               <a:spcBef>
                 <a:spcPts val="1200"/>
               </a:spcBef>
@@ -21944,7 +21772,7 @@
               </a:buClr>
             </a:pPr>
             <a:r>
-              <a:rPr lang="it-IT" dirty="0">
+              <a:rPr lang="en-US" dirty="0">
                 <a:solidFill>
                   <a:schemeClr val="tx1">
                     <a:lumMod val="75000"/>
@@ -21953,56 +21781,17 @@
                 </a:solidFill>
                 <a:cs typeface="Segoe UI" panose="020B0502040204020203" pitchFamily="34" charset="0"/>
               </a:rPr>
-              <a:t>In particolare è stata realizzata un’</a:t>
+              <a:t>In particular, an Android application has been created that uses the open source tool OpenCV to identify the bright areas captured by the camera. The position of the bright spots is used to send the pointer coordinates via Bluetooth.</a:t>
             </a:r>
-            <a:r>
-              <a:rPr lang="it-IT" b="1" dirty="0">
-                <a:solidFill>
-                  <a:schemeClr val="tx1">
-                    <a:lumMod val="75000"/>
-                    <a:lumOff val="25000"/>
-                  </a:schemeClr>
-                </a:solidFill>
-                <a:cs typeface="Segoe UI" panose="020B0502040204020203" pitchFamily="34" charset="0"/>
-              </a:rPr>
-              <a:t>applicazione Android</a:t>
-            </a:r>
-            <a:r>
-              <a:rPr lang="it-IT" dirty="0">
-                <a:solidFill>
-                  <a:schemeClr val="tx1">
-                    <a:lumMod val="75000"/>
-                    <a:lumOff val="25000"/>
-                  </a:schemeClr>
-                </a:solidFill>
-                <a:cs typeface="Segoe UI" panose="020B0502040204020203" pitchFamily="34" charset="0"/>
-              </a:rPr>
-              <a:t> che utilizza lo strumento open source </a:t>
-            </a:r>
-            <a:r>
-              <a:rPr lang="it-IT" b="1" dirty="0" err="1">
-                <a:solidFill>
-                  <a:schemeClr val="tx1">
-                    <a:lumMod val="75000"/>
-                    <a:lumOff val="25000"/>
-                  </a:schemeClr>
-                </a:solidFill>
-                <a:cs typeface="Segoe UI" panose="020B0502040204020203" pitchFamily="34" charset="0"/>
-              </a:rPr>
-              <a:t>OpenCV</a:t>
-            </a:r>
-            <a:r>
-              <a:rPr lang="it-IT" dirty="0">
-                <a:solidFill>
-                  <a:schemeClr val="tx1">
-                    <a:lumMod val="75000"/>
-                    <a:lumOff val="25000"/>
-                  </a:schemeClr>
-                </a:solidFill>
-                <a:cs typeface="Segoe UI" panose="020B0502040204020203" pitchFamily="34" charset="0"/>
-              </a:rPr>
-              <a:t> per individuare le zone luminose catturate dalla fotocamera. La posizione dei punti luminosi viene utilizzata per inviare tramite Bluetooth le coordinate del puntatore. </a:t>
-            </a:r>
+            <a:endParaRPr lang="it-IT" dirty="0">
+              <a:solidFill>
+                <a:schemeClr val="tx1">
+                  <a:lumMod val="75000"/>
+                  <a:lumOff val="25000"/>
+                </a:schemeClr>
+              </a:solidFill>
+              <a:cs typeface="Segoe UI" panose="020B0502040204020203" pitchFamily="34" charset="0"/>
+            </a:endParaRPr>
           </a:p>
         </p:txBody>
       </p:sp>
@@ -22035,20 +21824,16 @@
           <a:lstStyle/>
           <a:p>
             <a:r>
-              <a:rPr lang="it-IT" dirty="0"/>
-              <a:t>La scheda </a:t>
-            </a:r>
-            <a:r>
-              <a:rPr lang="it-IT" b="1" dirty="0"/>
-              <a:t>STM32F3DISCOVERY</a:t>
+              <a:rPr lang="en-US" dirty="0"/>
+              <a:t>The STM32F3DISCOVERY board is a development board that allows the creation of embedded systems in a simple and fast way. This board is equipped with</a:t>
             </a:r>
             <a:r>
               <a:rPr lang="it-IT" dirty="0"/>
-              <a:t> è una scheda di sviluppo che permette la creazioni di sistemi embedded in modo semplice e rapido. Questa board è dotata di:</a:t>
+              <a:t>:</a:t>
             </a:r>
           </a:p>
           <a:p>
-            <a:pPr marL="171450" indent="-171450" rtl="0">
+            <a:pPr marL="171450" indent="-171450">
               <a:spcBef>
                 <a:spcPts val="1200"/>
               </a:spcBef>
@@ -22059,7 +21844,7 @@
               <a:buChar char="›"/>
             </a:pPr>
             <a:r>
-              <a:rPr lang="it-IT" sz="1800" dirty="0">
+              <a:rPr lang="en-US" dirty="0">
                 <a:solidFill>
                   <a:schemeClr val="tx1">
                     <a:lumMod val="75000"/>
@@ -22068,22 +21853,10 @@
                 </a:solidFill>
                 <a:cs typeface="Segoe UI" panose="020B0502040204020203" pitchFamily="34" charset="0"/>
               </a:rPr>
-              <a:t>MCU STM32F303VCT6 basata su ARM Cortex-M4 @72 Mhz con 256 KB di memoria flash e 48 KB di RAM.</a:t>
+              <a:t>ARM Cortex-M4 @72 </a:t>
             </a:r>
-          </a:p>
-          <a:p>
-            <a:pPr marL="171450" indent="-171450" rtl="0">
-              <a:spcBef>
-                <a:spcPts val="1200"/>
-              </a:spcBef>
-              <a:buClr>
-                <a:schemeClr val="tx2"/>
-              </a:buClr>
-              <a:buFont typeface="Segoe UI Light" panose="020B0502040204020203" pitchFamily="34" charset="0"/>
-              <a:buChar char="›"/>
-            </a:pPr>
             <a:r>
-              <a:rPr lang="it-IT" sz="1800" dirty="0">
+              <a:rPr lang="en-US" dirty="0" err="1">
                 <a:solidFill>
                   <a:schemeClr val="tx1">
                     <a:lumMod val="75000"/>
@@ -22092,10 +21865,10 @@
                 </a:solidFill>
                 <a:cs typeface="Segoe UI" panose="020B0502040204020203" pitchFamily="34" charset="0"/>
               </a:rPr>
-              <a:t>Digital </a:t>
+              <a:t>Mhz</a:t>
             </a:r>
             <a:r>
-              <a:rPr lang="it-IT" sz="1800" dirty="0" err="1">
+              <a:rPr lang="en-US" dirty="0">
                 <a:solidFill>
                   <a:schemeClr val="tx1">
                     <a:lumMod val="75000"/>
@@ -22104,7 +21877,7 @@
                 </a:solidFill>
                 <a:cs typeface="Segoe UI" panose="020B0502040204020203" pitchFamily="34" charset="0"/>
               </a:rPr>
-              <a:t>Analog</a:t>
+              <a:t>-based STM32F303VCT6 MCU with 256 KB of flash memory and 48 KB of RAM</a:t>
             </a:r>
             <a:r>
               <a:rPr lang="it-IT" sz="1800" dirty="0">
@@ -22116,10 +21889,22 @@
                 </a:solidFill>
                 <a:cs typeface="Segoe UI" panose="020B0502040204020203" pitchFamily="34" charset="0"/>
               </a:rPr>
-              <a:t> Converter, </a:t>
+              <a:t>.</a:t>
             </a:r>
+          </a:p>
+          <a:p>
+            <a:pPr marL="171450" indent="-171450">
+              <a:spcBef>
+                <a:spcPts val="1200"/>
+              </a:spcBef>
+              <a:buClr>
+                <a:schemeClr val="tx2"/>
+              </a:buClr>
+              <a:buFont typeface="Segoe UI Light" panose="020B0502040204020203" pitchFamily="34" charset="0"/>
+              <a:buChar char="›"/>
+            </a:pPr>
             <a:r>
-              <a:rPr lang="it-IT" sz="1800" dirty="0" err="1">
+              <a:rPr lang="en-US" dirty="0">
                 <a:solidFill>
                   <a:schemeClr val="tx1">
                     <a:lumMod val="75000"/>
@@ -22128,7 +21913,8 @@
                 </a:solidFill>
                 <a:cs typeface="Segoe UI" panose="020B0502040204020203" pitchFamily="34" charset="0"/>
               </a:rPr>
-              <a:t>Analog</a:t>
+              <a:t>Digital Analog Converter, Analog Digital Converter, Comparators, Operational Amplifiers.
+ 8 LEDs and two buttons connected to the GPIO interface</a:t>
             </a:r>
             <a:r>
               <a:rPr lang="it-IT" sz="1800" dirty="0">
@@ -22140,11 +21926,11 @@
                 </a:solidFill>
                 <a:cs typeface="Segoe UI" panose="020B0502040204020203" pitchFamily="34" charset="0"/>
               </a:rPr>
-              <a:t> Digital Converter, comparatori, amplificatori operazionali.</a:t>
+              <a:t>.</a:t>
             </a:r>
           </a:p>
           <a:p>
-            <a:pPr marL="171450" indent="-171450" rtl="0">
+            <a:pPr marL="171450" indent="-171450">
               <a:spcBef>
                 <a:spcPts val="1200"/>
               </a:spcBef>
@@ -22155,7 +21941,7 @@
               <a:buChar char="›"/>
             </a:pPr>
             <a:r>
-              <a:rPr lang="it-IT" sz="1800" dirty="0">
+              <a:rPr lang="en-US" dirty="0">
                 <a:solidFill>
                   <a:schemeClr val="tx1">
                     <a:lumMod val="75000"/>
@@ -22164,43 +21950,7 @@
                 </a:solidFill>
                 <a:cs typeface="Segoe UI" panose="020B0502040204020203" pitchFamily="34" charset="0"/>
               </a:rPr>
-              <a:t> 8 LED e due pulsanti collegati all’interfaccia GPIO.</a:t>
-            </a:r>
-          </a:p>
-          <a:p>
-            <a:pPr marL="171450" indent="-171450" rtl="0">
-              <a:spcBef>
-                <a:spcPts val="1200"/>
-              </a:spcBef>
-              <a:buClr>
-                <a:schemeClr val="tx2"/>
-              </a:buClr>
-              <a:buFont typeface="Segoe UI Light" panose="020B0502040204020203" pitchFamily="34" charset="0"/>
-              <a:buChar char="›"/>
-            </a:pPr>
-            <a:r>
-              <a:rPr lang="it-IT" sz="1800" dirty="0">
-                <a:solidFill>
-                  <a:schemeClr val="tx1">
-                    <a:lumMod val="75000"/>
-                    <a:lumOff val="25000"/>
-                  </a:schemeClr>
-                </a:solidFill>
-                <a:cs typeface="Segoe UI" panose="020B0502040204020203" pitchFamily="34" charset="0"/>
-              </a:rPr>
-              <a:t>Connettività tramite i protocolli </a:t>
-            </a:r>
-            <a:r>
-              <a:rPr lang="it-IT" sz="1800" b="1" dirty="0">
-                <a:solidFill>
-                  <a:schemeClr val="tx1">
-                    <a:lumMod val="75000"/>
-                    <a:lumOff val="25000"/>
-                  </a:schemeClr>
-                </a:solidFill>
-                <a:cs typeface="Segoe UI" panose="020B0502040204020203" pitchFamily="34" charset="0"/>
-              </a:rPr>
-              <a:t>USART</a:t>
+              <a:t>Connectivity via USART, SPI, I2C, USB and CAN protocols</a:t>
             </a:r>
             <a:r>
               <a:rPr lang="it-IT" sz="1800" dirty="0">
@@ -22212,31 +21962,7 @@
                 </a:solidFill>
                 <a:cs typeface="Segoe UI" panose="020B0502040204020203" pitchFamily="34" charset="0"/>
               </a:rPr>
-              <a:t>, </a:t>
-            </a:r>
-            <a:r>
-              <a:rPr lang="it-IT" sz="1800" b="1" dirty="0">
-                <a:solidFill>
-                  <a:schemeClr val="tx1">
-                    <a:lumMod val="75000"/>
-                    <a:lumOff val="25000"/>
-                  </a:schemeClr>
-                </a:solidFill>
-                <a:cs typeface="Segoe UI" panose="020B0502040204020203" pitchFamily="34" charset="0"/>
-              </a:rPr>
-              <a:t>SPI</a:t>
-            </a:r>
-            <a:r>
-              <a:rPr lang="it-IT" sz="1800" dirty="0">
-                <a:solidFill>
-                  <a:schemeClr val="tx1">
-                    <a:lumMod val="75000"/>
-                    <a:lumOff val="25000"/>
-                  </a:schemeClr>
-                </a:solidFill>
-                <a:cs typeface="Segoe UI" panose="020B0502040204020203" pitchFamily="34" charset="0"/>
-              </a:rPr>
-              <a:t>, I2C, USB e CAN.</a:t>
+              <a:t>.</a:t>
             </a:r>
           </a:p>
         </p:txBody>
@@ -22370,7 +22096,7 @@
         <p:spPr>
           <a:xfrm>
             <a:off x="228600" y="190500"/>
-            <a:ext cx="11734800" cy="775597"/>
+            <a:ext cx="11734800" cy="387798"/>
           </a:xfrm>
           <a:prstGeom prst="rect">
             <a:avLst/>
@@ -22400,7 +22126,7 @@
             </a:lvl1pPr>
           </a:lstStyle>
           <a:p>
-            <a:pPr algn="ctr" rtl="0"/>
+            <a:pPr algn="ctr"/>
             <a:r>
               <a:rPr lang="it-IT" sz="2800" b="1" dirty="0">
                 <a:solidFill>
@@ -22410,10 +22136,10 @@
                   </a:schemeClr>
                 </a:solidFill>
               </a:rPr>
-              <a:t>Hardware utilizzato</a:t>
+              <a:t>Hardware </a:t>
             </a:r>
-            <a:br>
-              <a:rPr lang="it-IT" sz="2800" dirty="0">
+            <a:r>
+              <a:rPr lang="it-IT" sz="2800" b="1" dirty="0" err="1">
                 <a:solidFill>
                   <a:schemeClr val="tx1">
                     <a:lumMod val="75000"/>
@@ -22421,7 +22147,8 @@
                   </a:schemeClr>
                 </a:solidFill>
               </a:rPr>
-            </a:br>
+              <a:t>used</a:t>
+            </a:r>
             <a:endParaRPr lang="it-IT" sz="2800" dirty="0">
               <a:solidFill>
                 <a:schemeClr val="tx1">
@@ -22591,7 +22318,7 @@
         <p:spPr>
           <a:xfrm>
             <a:off x="3191774" y="1043796"/>
-            <a:ext cx="8315864" cy="1754326"/>
+            <a:ext cx="8315864" cy="1477328"/>
           </a:xfrm>
           <a:prstGeom prst="rect">
             <a:avLst/>
@@ -22605,25 +22332,10 @@
           <a:lstStyle/>
           <a:p>
             <a:r>
-              <a:rPr lang="it-IT" dirty="0"/>
-              <a:t>L’HC-05 è un modulo convertitore seriale-Bluetooth. In particolare può convertire i messaggi ricevuti tramite UART e inviarli tramite il Serial Port </a:t>
+              <a:rPr lang="en-US" dirty="0"/>
+              <a:t>The HC-05 is a serial-to-Bluetooth converter module. In particular, it can convert messages received via UART and send them via the Serial Port Profile (SPP) of the Bluetooth standard. Within a Bluetooth connection it can function both as a Master and as a Slave. Supports secure PIN pairing. It is powered by 5V and has a status LED and a button to start scanning nearby devices. The default baud rate is 9600 bits/s.</a:t>
             </a:r>
-            <a:r>
-              <a:rPr lang="it-IT" dirty="0" err="1"/>
-              <a:t>Profile</a:t>
-            </a:r>
-            <a:r>
-              <a:rPr lang="it-IT" dirty="0"/>
-              <a:t> (SPP) dello standard Bluetooth. All’interno di un collegamento Bluetooth può funzionare sia come Master che come Slave. Supporta il </a:t>
-            </a:r>
-            <a:r>
-              <a:rPr lang="it-IT" dirty="0" err="1"/>
-              <a:t>pairing</a:t>
-            </a:r>
-            <a:r>
-              <a:rPr lang="it-IT" dirty="0"/>
-              <a:t> sicuro mediante PIN. Viene alimentato a 5V e possiede un LED di stato e un pulsante per avviare lo scanning dei dispositivi vicini. Il baud rate di default è pari a 9600 bits/s.</a:t>
-            </a:r>
+            <a:endParaRPr lang="it-IT" dirty="0"/>
           </a:p>
         </p:txBody>
       </p:sp>
@@ -22656,25 +22368,18 @@
           <a:lstStyle/>
           <a:p>
             <a:r>
-              <a:rPr lang="it-IT" dirty="0"/>
-              <a:t>L’ST7735 è un economico microcontrollore su cui vengono basati semplici display LCD a colori. L’esemplare utilizzato ha una risoluzione di 128x160 e supporta i colori in formato RGB 5-6-5 con 65k di colori visualizzabili. Viene retroilluminato da due LED bianchi la cui luce viene riflessa su tutto lo schermo. Utilizza il protocollo Serial </a:t>
+              <a:rPr lang="en-US" dirty="0"/>
+              <a:t>The ST7735 is a cost-effective microcontroller that is based on simple color LCD displays. The sample used has a resolution of 128x160 and supports colors in RGB 5-6-5 format with 65k of displayable colors. It is backlit by two white LEDs whose light is reflected all over the screen. It uses the Serial </a:t>
             </a:r>
             <a:r>
-              <a:rPr lang="it-IT" dirty="0" err="1"/>
+              <a:rPr lang="en-US" dirty="0" err="1"/>
               <a:t>Periferal</a:t>
             </a:r>
             <a:r>
-              <a:rPr lang="it-IT" dirty="0"/>
-              <a:t> Interface (SPI), ma supporta anche il collegamento in parallelo (Intel 8080). Possiede anche un lettore di schede SD per poter visualizzare immagini in formato bitmap (.</a:t>
+              <a:rPr lang="en-US" dirty="0"/>
+              <a:t> Interface (SPI) protocol, but also supports parallel connection (Intel 8080). It also has an SD card reader to be able to view images in bitmap format (.bmp). It is powered at 5V with a separate connection for backlighting.</a:t>
             </a:r>
-            <a:r>
-              <a:rPr lang="it-IT" dirty="0" err="1"/>
-              <a:t>bmp</a:t>
-            </a:r>
-            <a:r>
-              <a:rPr lang="it-IT" dirty="0"/>
-              <a:t>). Viene alimentato a 5V con collegamento separato per la retroilluminazione.</a:t>
-            </a:r>
+            <a:endParaRPr lang="it-IT" dirty="0"/>
           </a:p>
         </p:txBody>
       </p:sp>
@@ -22807,7 +22512,7 @@
         <p:spPr>
           <a:xfrm>
             <a:off x="228600" y="190500"/>
-            <a:ext cx="11734800" cy="775597"/>
+            <a:ext cx="11734800" cy="387798"/>
           </a:xfrm>
           <a:prstGeom prst="rect">
             <a:avLst/>
@@ -22837,7 +22542,7 @@
             </a:lvl1pPr>
           </a:lstStyle>
           <a:p>
-            <a:pPr algn="ctr" rtl="0"/>
+            <a:pPr algn="ctr"/>
             <a:r>
               <a:rPr lang="it-IT" sz="2800" b="1" dirty="0">
                 <a:solidFill>
@@ -22847,10 +22552,10 @@
                   </a:schemeClr>
                 </a:solidFill>
               </a:rPr>
-              <a:t>Hardware utilizzato</a:t>
+              <a:t>Hardware </a:t>
             </a:r>
-            <a:br>
-              <a:rPr lang="it-IT" sz="2800" dirty="0">
+            <a:r>
+              <a:rPr lang="it-IT" sz="2800" b="1" dirty="0" err="1">
                 <a:solidFill>
                   <a:schemeClr val="tx1">
                     <a:lumMod val="75000"/>
@@ -22858,7 +22563,8 @@
                   </a:schemeClr>
                 </a:solidFill>
               </a:rPr>
-            </a:br>
+              <a:t>used</a:t>
+            </a:r>
             <a:endParaRPr lang="it-IT" sz="2800" dirty="0">
               <a:solidFill>
                 <a:schemeClr val="tx1">
@@ -23089,9 +22795,10 @@
           <a:lstStyle/>
           <a:p>
             <a:r>
-              <a:rPr lang="it-IT" dirty="0"/>
-              <a:t>Resistori</a:t>
+              <a:rPr lang="it-IT" dirty="0" err="1"/>
+              <a:t>Resistors</a:t>
             </a:r>
+            <a:endParaRPr lang="it-IT" dirty="0"/>
           </a:p>
         </p:txBody>
       </p:sp>
@@ -23110,7 +22817,7 @@
         <p:spPr>
           <a:xfrm>
             <a:off x="4490865" y="4327340"/>
-            <a:ext cx="3355675" cy="646331"/>
+            <a:ext cx="3355675" cy="923330"/>
           </a:xfrm>
           <a:prstGeom prst="rect">
             <a:avLst/>
@@ -23125,20 +22832,16 @@
           <a:p>
             <a:pPr algn="ctr"/>
             <a:r>
-              <a:rPr lang="it-IT" dirty="0"/>
-              <a:t>LED IR 940 nm. Con </a:t>
+              <a:rPr lang="en-US" dirty="0"/>
+              <a:t>940 nm IR LED. With </a:t>
             </a:r>
             <a:r>
-              <a:rPr lang="it-IT" dirty="0" err="1"/>
+              <a:rPr lang="en-US" dirty="0" err="1"/>
               <a:t>Vf</a:t>
             </a:r>
             <a:r>
-              <a:rPr lang="it-IT" dirty="0"/>
-              <a:t> = 1.5-1.6V e corrente assorbita di 60 </a:t>
-            </a:r>
-            <a:r>
-              <a:rPr lang="it-IT" dirty="0" err="1"/>
-              <a:t>mA</a:t>
+              <a:rPr lang="en-US" dirty="0"/>
+              <a:t> = 1.5-1.6V and current consumption of 60 mA</a:t>
             </a:r>
             <a:endParaRPr lang="it-IT" dirty="0"/>
           </a:p>
@@ -23175,8 +22878,13 @@
             <a:pPr algn="ctr"/>
             <a:r>
               <a:rPr lang="it-IT" dirty="0"/>
-              <a:t>Batteria da 9V</a:t>
+              <a:t>9V </a:t>
             </a:r>
+            <a:r>
+              <a:rPr lang="it-IT" dirty="0" err="1"/>
+              <a:t>battery</a:t>
+            </a:r>
+            <a:endParaRPr lang="it-IT" dirty="0"/>
           </a:p>
         </p:txBody>
       </p:sp>
@@ -23498,40 +23206,24 @@
           <a:lstStyle/>
           <a:p>
             <a:r>
-              <a:rPr lang="it-IT" dirty="0"/>
-              <a:t>È un bus standard di comunicazione sviluppato da Motorola. La trasmissione avviene tra un Master e uno o più Slave. Il Master oltre a controllare il bus emette anche il segnale di clock. </a:t>
-            </a:r>
-          </a:p>
-          <a:p>
-            <a:r>
-              <a:rPr lang="it-IT" dirty="0"/>
-              <a:t>Per quanto riguarda la velocità di trasmissione non vi è un limite inferiore o superiore e la velocità viene dettata dai limiti fisici (capacità parassite) o dalle specifiche fornite col datasheet del dispositivo.</a:t>
-            </a:r>
-          </a:p>
-          <a:p>
-            <a:r>
-              <a:rPr lang="it-IT" dirty="0"/>
-              <a:t>Il protocollo SPI è di tipo </a:t>
-            </a:r>
-            <a:r>
-              <a:rPr lang="it-IT" b="1" dirty="0"/>
-              <a:t>seriale</a:t>
+              <a:rPr lang="en-US" dirty="0"/>
+              <a:t>It is a communication standard bus developed by Motorola. The transmission takes place between a Master and one or more Slaves. The Master in addition to controlling the bus also emits the clock signal</a:t>
             </a:r>
             <a:r>
               <a:rPr lang="it-IT" dirty="0"/>
-              <a:t>, </a:t>
+              <a:t>. </a:t>
             </a:r>
+          </a:p>
+          <a:p>
             <a:r>
-              <a:rPr lang="it-IT" b="1" dirty="0"/>
-              <a:t>sincrono</a:t>
+              <a:rPr lang="en-US" dirty="0"/>
+              <a:t>As far as the transmission speed is concerned, there is no lower or upper limit and the speed is dictated by the physical limits (parasitic capacitance) or by the specifications provided with the device datasheet.</a:t>
             </a:r>
+          </a:p>
+          <a:p>
             <a:r>
-              <a:rPr lang="it-IT" dirty="0"/>
-              <a:t> e </a:t>
-            </a:r>
-            <a:r>
-              <a:rPr lang="it-IT" b="1" dirty="0"/>
-              <a:t>full-duplex</a:t>
+              <a:rPr lang="en-US" dirty="0"/>
+              <a:t>The SPI protocol is serial, synchronous and full-duplex</a:t>
             </a:r>
             <a:r>
               <a:rPr lang="it-IT" dirty="0"/>
@@ -23540,12 +23232,52 @@
           </a:p>
           <a:p>
             <a:r>
+              <a:rPr lang="en-US" dirty="0"/>
+              <a:t>SPI is realized with four signals</a:t>
+            </a:r>
+            <a:r>
               <a:rPr lang="it-IT" dirty="0"/>
-              <a:t>SPI viene realizzato con quattro segnali:</a:t>
+              <a:t>:</a:t>
             </a:r>
           </a:p>
           <a:p>
-            <a:pPr marL="171450" indent="-171450" rtl="0">
+            <a:pPr marL="171450" indent="-171450">
+              <a:spcBef>
+                <a:spcPts val="1200"/>
+              </a:spcBef>
+              <a:buClr>
+                <a:schemeClr val="tx2"/>
+              </a:buClr>
+              <a:buFont typeface="Segoe UI Light" panose="020B0502040204020203" pitchFamily="34" charset="0"/>
+              <a:buChar char="›"/>
+            </a:pPr>
+            <a:r>
+              <a:rPr lang="en-US" dirty="0">
+                <a:solidFill>
+                  <a:schemeClr val="tx1">
+                    <a:lumMod val="75000"/>
+                    <a:lumOff val="25000"/>
+                  </a:schemeClr>
+                </a:solidFill>
+                <a:cs typeface="Segoe UI" panose="020B0502040204020203" pitchFamily="34" charset="0"/>
+              </a:rPr>
+              <a:t>SCLK (also called SCK, CLK) – Serial Clock</a:t>
+            </a:r>
+            <a:r>
+              <a:rPr lang="it-IT" dirty="0">
+                <a:solidFill>
+                  <a:schemeClr val="tx1">
+                    <a:lumMod val="75000"/>
+                    <a:lumOff val="25000"/>
+                  </a:schemeClr>
+                </a:solidFill>
+                <a:cs typeface="Segoe UI" panose="020B0502040204020203" pitchFamily="34" charset="0"/>
+              </a:rPr>
+              <a:t>.</a:t>
+            </a:r>
+          </a:p>
+          <a:p>
+            <a:pPr marL="171450" indent="-171450">
               <a:spcBef>
                 <a:spcPts val="1200"/>
               </a:spcBef>
@@ -23565,11 +23297,35 @@
                 </a:solidFill>
                 <a:cs typeface="Segoe UI" panose="020B0502040204020203" pitchFamily="34" charset="0"/>
               </a:rPr>
-              <a:t>SCLK (chiamato anche SCK, CLK) – Serial Clock.</a:t>
+              <a:t>SDI (also </a:t>
             </a:r>
-          </a:p>
-          <a:p>
-            <a:pPr marL="171450" indent="-171450" rtl="0">
+            <a:r>
+              <a:rPr lang="it-IT" dirty="0" err="1">
+                <a:solidFill>
+                  <a:schemeClr val="tx1">
+                    <a:lumMod val="75000"/>
+                    <a:lumOff val="25000"/>
+                  </a:schemeClr>
+                </a:solidFill>
+                <a:cs typeface="Segoe UI" panose="020B0502040204020203" pitchFamily="34" charset="0"/>
+              </a:rPr>
+              <a:t>called</a:t>
+            </a:r>
+            <a:r>
+              <a:rPr lang="it-IT" dirty="0">
+                <a:solidFill>
+                  <a:schemeClr val="tx1">
+                    <a:lumMod val="75000"/>
+                    <a:lumOff val="25000"/>
+                  </a:schemeClr>
+                </a:solidFill>
+                <a:cs typeface="Segoe UI" panose="020B0502040204020203" pitchFamily="34" charset="0"/>
+              </a:rPr>
+              <a:t> MISO, SOMI, DI, SO) – Serial Data Input (Master Input Slave Output).</a:t>
+            </a:r>
+          </a:p>
+          <a:p>
+            <a:pPr marL="171450" indent="-171450">
               <a:spcBef>
                 <a:spcPts val="1200"/>
               </a:spcBef>
@@ -23580,6 +23336,18 @@
               <a:buChar char="›"/>
             </a:pPr>
             <a:r>
+              <a:rPr lang="en-US" dirty="0">
+                <a:solidFill>
+                  <a:schemeClr val="tx1">
+                    <a:lumMod val="75000"/>
+                    <a:lumOff val="25000"/>
+                  </a:schemeClr>
+                </a:solidFill>
+                <a:cs typeface="Segoe UI" panose="020B0502040204020203" pitchFamily="34" charset="0"/>
+              </a:rPr>
+              <a:t>SDO (also called MOSI, SIMO, DO, SI) – Serial Data Output (Master Output Slave Input)</a:t>
+            </a:r>
+            <a:r>
               <a:rPr lang="it-IT" dirty="0">
                 <a:solidFill>
                   <a:schemeClr val="tx1">
@@ -23589,11 +23357,11 @@
                 </a:solidFill>
                 <a:cs typeface="Segoe UI" panose="020B0502040204020203" pitchFamily="34" charset="0"/>
               </a:rPr>
-              <a:t>SDI (chiamato anche MISO, SOMI, DI, SO) – Serial Data Input (Master Input Slave Output).</a:t>
+              <a:t>.</a:t>
             </a:r>
           </a:p>
           <a:p>
-            <a:pPr marL="171450" indent="-171450" rtl="0">
+            <a:pPr marL="171450" indent="-171450">
               <a:spcBef>
                 <a:spcPts val="1200"/>
               </a:spcBef>
@@ -23604,31 +23372,7 @@
               <a:buChar char="›"/>
             </a:pPr>
             <a:r>
-              <a:rPr lang="it-IT" dirty="0">
-                <a:solidFill>
-                  <a:schemeClr val="tx1">
-                    <a:lumMod val="75000"/>
-                    <a:lumOff val="25000"/>
-                  </a:schemeClr>
-                </a:solidFill>
-                <a:cs typeface="Segoe UI" panose="020B0502040204020203" pitchFamily="34" charset="0"/>
-              </a:rPr>
-              <a:t>SDO (chiamato anche MOSI, SIMO, DO, SI) – Serial Data Output (Master Output Slave Input).</a:t>
-            </a:r>
-          </a:p>
-          <a:p>
-            <a:pPr marL="171450" indent="-171450" rtl="0">
-              <a:spcBef>
-                <a:spcPts val="1200"/>
-              </a:spcBef>
-              <a:buClr>
-                <a:schemeClr val="tx2"/>
-              </a:buClr>
-              <a:buFont typeface="Segoe UI Light" panose="020B0502040204020203" pitchFamily="34" charset="0"/>
-              <a:buChar char="›"/>
-            </a:pPr>
-            <a:r>
-              <a:rPr lang="it-IT" dirty="0">
+              <a:rPr lang="en-US" dirty="0">
                 <a:solidFill>
                   <a:schemeClr val="tx1">
                     <a:lumMod val="75000"/>
@@ -23640,7 +23384,7 @@
               <a:t>CS (SS, </a:t>
             </a:r>
             <a:r>
-              <a:rPr lang="it-IT" dirty="0" err="1">
+              <a:rPr lang="en-US" dirty="0" err="1">
                 <a:solidFill>
                   <a:schemeClr val="tx1">
                     <a:lumMod val="75000"/>
@@ -23652,7 +23396,7 @@
               <a:t>nCS</a:t>
             </a:r>
             <a:r>
-              <a:rPr lang="it-IT" dirty="0">
+              <a:rPr lang="en-US" dirty="0">
                 <a:solidFill>
                   <a:schemeClr val="tx1">
                     <a:lumMod val="75000"/>
@@ -23664,7 +23408,7 @@
               <a:t>, </a:t>
             </a:r>
             <a:r>
-              <a:rPr lang="it-IT" dirty="0" err="1">
+              <a:rPr lang="en-US" dirty="0" err="1">
                 <a:solidFill>
                   <a:schemeClr val="tx1">
                     <a:lumMod val="75000"/>
@@ -23676,6 +23420,18 @@
               <a:t>nSS</a:t>
             </a:r>
             <a:r>
+              <a:rPr lang="en-US" dirty="0">
+                <a:solidFill>
+                  <a:schemeClr val="tx1">
+                    <a:lumMod val="75000"/>
+                    <a:lumOff val="25000"/>
+                  </a:schemeClr>
+                </a:solidFill>
+                <a:cs typeface="Segoe UI" panose="020B0502040204020203" pitchFamily="34" charset="0"/>
+              </a:rPr>
+              <a:t>, STE) – Chip Select used by the Master to select the Slave, to start the communication the slave must be placed at a low logic level</a:t>
+            </a:r>
+            <a:r>
               <a:rPr lang="it-IT" dirty="0">
                 <a:solidFill>
                   <a:schemeClr val="tx1">
@@ -23685,7 +23441,7 @@
                 </a:solidFill>
                 <a:cs typeface="Segoe UI" panose="020B0502040204020203" pitchFamily="34" charset="0"/>
               </a:rPr>
-              <a:t>, STE) – Chip Select utilizzato dal Master per selezionare lo Slave, per avviare la comunicazione lo slave deve essere posto a livello logico basso.</a:t>
+              <a:t>.</a:t>
             </a:r>
             <a:endParaRPr lang="it-IT" dirty="0"/>
           </a:p>
